--- a/public/ppt-beautify/full/green-academic.pptx
+++ b/public/ppt-beautify/full/green-academic.pptx
@@ -2095,7 +2095,7 @@
           <a:bodyPr wrap="square" rtlCol="0" anchor="ctr"/>
           <a:lstStyle/>
           <a:p>
-            <a:pPr indent="0" marL="0">
+            <a:pPr algn="l" indent="0" marL="0">
               <a:buNone/>
             </a:pPr>
             <a:r>
@@ -2134,7 +2134,7 @@
           <a:bodyPr wrap="square" rtlCol="0" anchor="ctr"/>
           <a:lstStyle/>
           <a:p>
-            <a:pPr indent="0" marL="0">
+            <a:pPr algn="l" indent="0" marL="0">
               <a:buNone/>
             </a:pPr>
             <a:r>
@@ -2344,55 +2344,6 @@
         </p:nvSpPr>
         <p:spPr>
           <a:xfrm>
-            <a:off x="7909560" y="201168"/>
-            <a:ext cx="685800" cy="685800"/>
-          </a:xfrm>
-          <a:prstGeom prst="ellipse">
-            <a:avLst/>
-          </a:prstGeom>
-          <a:solidFill>
-            <a:srgbClr val="ECFDF5">
-              <a:alpha val="0"/>
-            </a:srgbClr>
-          </a:solidFill>
-          <a:ln w="15875">
-            <a:solidFill>
-              <a:srgbClr val="FBBF24"/>
-            </a:solidFill>
-            <a:prstDash val="solid"/>
-          </a:ln>
-        </p:spPr>
-      </p:sp>
-      <p:sp>
-        <p:nvSpPr>
-          <p:cNvPr id="6" name="Shape 4"/>
-          <p:cNvSpPr/>
-          <p:nvPr/>
-        </p:nvSpPr>
-        <p:spPr>
-          <a:xfrm>
-            <a:off x="8183880" y="384048"/>
-            <a:ext cx="384048" cy="384048"/>
-          </a:xfrm>
-          <a:prstGeom prst="ellipse">
-            <a:avLst/>
-          </a:prstGeom>
-          <a:solidFill>
-            <a:srgbClr val="FBBF24">
-              <a:alpha val="35000"/>
-            </a:srgbClr>
-          </a:solidFill>
-          <a:ln/>
-        </p:spPr>
-      </p:sp>
-      <p:sp>
-        <p:nvSpPr>
-          <p:cNvPr id="7" name="Shape 5"/>
-          <p:cNvSpPr/>
-          <p:nvPr/>
-        </p:nvSpPr>
-        <p:spPr>
-          <a:xfrm>
             <a:off x="109728" y="0"/>
             <a:ext cx="9034272" cy="960120"/>
           </a:xfrm>
@@ -2407,7 +2358,7 @@
       </p:sp>
       <p:sp>
         <p:nvSpPr>
-          <p:cNvPr id="8" name="Shape 6"/>
+          <p:cNvPr id="6" name="Shape 4"/>
           <p:cNvSpPr/>
           <p:nvPr/>
         </p:nvSpPr>
@@ -2429,7 +2380,7 @@
       </p:sp>
       <p:sp>
         <p:nvSpPr>
-          <p:cNvPr id="9" name="Shape 7"/>
+          <p:cNvPr id="7" name="Shape 5"/>
           <p:cNvSpPr/>
           <p:nvPr/>
         </p:nvSpPr>
@@ -2451,7 +2402,7 @@
       </p:sp>
       <p:sp>
         <p:nvSpPr>
-          <p:cNvPr id="10" name="Shape 8"/>
+          <p:cNvPr id="8" name="Shape 6"/>
           <p:cNvSpPr/>
           <p:nvPr/>
         </p:nvSpPr>
@@ -2471,7 +2422,7 @@
       </p:sp>
       <p:sp>
         <p:nvSpPr>
-          <p:cNvPr id="11" name="Shape 9"/>
+          <p:cNvPr id="9" name="Shape 7"/>
           <p:cNvSpPr/>
           <p:nvPr/>
         </p:nvSpPr>
@@ -2502,7 +2453,7 @@
       </p:sp>
       <p:sp>
         <p:nvSpPr>
-          <p:cNvPr id="12" name="Text 10"/>
+          <p:cNvPr id="10" name="Text 8"/>
           <p:cNvSpPr/>
           <p:nvPr/>
         </p:nvSpPr>
@@ -2543,7 +2494,7 @@
       </p:sp>
       <p:sp>
         <p:nvSpPr>
-          <p:cNvPr id="13" name="Text 11"/>
+          <p:cNvPr id="11" name="Text 9"/>
           <p:cNvSpPr/>
           <p:nvPr/>
         </p:nvSpPr>
@@ -2582,7 +2533,7 @@
       </p:sp>
       <p:sp>
         <p:nvSpPr>
-          <p:cNvPr id="14" name="Shape 12"/>
+          <p:cNvPr id="12" name="Shape 10"/>
           <p:cNvSpPr/>
           <p:nvPr/>
         </p:nvSpPr>
@@ -2616,7 +2567,7 @@
       </p:sp>
       <p:sp>
         <p:nvSpPr>
-          <p:cNvPr id="15" name="Shape 13"/>
+          <p:cNvPr id="13" name="Shape 11"/>
           <p:cNvSpPr/>
           <p:nvPr/>
         </p:nvSpPr>
@@ -2645,7 +2596,7 @@
       </p:sp>
       <p:sp>
         <p:nvSpPr>
-          <p:cNvPr id="16" name="Shape 14"/>
+          <p:cNvPr id="14" name="Shape 12"/>
           <p:cNvSpPr/>
           <p:nvPr/>
         </p:nvSpPr>
@@ -2667,7 +2618,7 @@
       </p:sp>
       <p:sp>
         <p:nvSpPr>
-          <p:cNvPr id="17" name="Shape 15"/>
+          <p:cNvPr id="15" name="Shape 13"/>
           <p:cNvSpPr/>
           <p:nvPr/>
         </p:nvSpPr>
@@ -2701,36 +2652,7 @@
       </p:sp>
       <p:sp>
         <p:nvSpPr>
-          <p:cNvPr id="18" name="Shape 16"/>
-          <p:cNvSpPr/>
-          <p:nvPr/>
-        </p:nvSpPr>
-        <p:spPr>
-          <a:xfrm>
-            <a:off x="796625" y="1500713"/>
-            <a:ext cx="190927" cy="190927"/>
-          </a:xfrm>
-          <a:prstGeom prst="roundRect">
-            <a:avLst>
-              <a:gd name="adj" fmla="val 181992"/>
-            </a:avLst>
-          </a:prstGeom>
-          <a:solidFill>
-            <a:srgbClr val="FBBF24">
-              <a:alpha val="80000"/>
-            </a:srgbClr>
-          </a:solidFill>
-          <a:ln w="12700">
-            <a:solidFill>
-              <a:srgbClr val="333333"/>
-            </a:solidFill>
-            <a:prstDash val="solid"/>
-          </a:ln>
-        </p:spPr>
-      </p:sp>
-      <p:sp>
-        <p:nvSpPr>
-          <p:cNvPr id="19" name="Text 17"/>
+          <p:cNvPr id="16" name="Text 14"/>
           <p:cNvSpPr/>
           <p:nvPr/>
         </p:nvSpPr>
@@ -2769,7 +2691,7 @@
       </p:sp>
       <p:sp>
         <p:nvSpPr>
-          <p:cNvPr id="20" name="Text 18"/>
+          <p:cNvPr id="17" name="Text 15"/>
           <p:cNvSpPr/>
           <p:nvPr/>
         </p:nvSpPr>
@@ -2789,9 +2711,6 @@
           <a:lstStyle/>
           <a:p>
             <a:pPr indent="0" marL="0">
-              <a:lnSpc>
-                <a:spcPct val="115000"/>
-              </a:lnSpc>
               <a:buNone/>
             </a:pPr>
             <a:r>
@@ -2811,7 +2730,7 @@
       </p:sp>
       <p:sp>
         <p:nvSpPr>
-          <p:cNvPr id="21" name="Shape 19"/>
+          <p:cNvPr id="18" name="Shape 16"/>
           <p:cNvSpPr/>
           <p:nvPr/>
         </p:nvSpPr>
@@ -2840,7 +2759,7 @@
       </p:sp>
       <p:sp>
         <p:nvSpPr>
-          <p:cNvPr id="22" name="Shape 20"/>
+          <p:cNvPr id="19" name="Shape 17"/>
           <p:cNvSpPr/>
           <p:nvPr/>
         </p:nvSpPr>
@@ -2862,7 +2781,7 @@
       </p:sp>
       <p:sp>
         <p:nvSpPr>
-          <p:cNvPr id="23" name="Shape 21"/>
+          <p:cNvPr id="20" name="Shape 18"/>
           <p:cNvSpPr/>
           <p:nvPr/>
         </p:nvSpPr>
@@ -2896,36 +2815,7 @@
       </p:sp>
       <p:sp>
         <p:nvSpPr>
-          <p:cNvPr id="24" name="Shape 22"/>
-          <p:cNvSpPr/>
-          <p:nvPr/>
-        </p:nvSpPr>
-        <p:spPr>
-          <a:xfrm>
-            <a:off x="796625" y="2122505"/>
-            <a:ext cx="190927" cy="190927"/>
-          </a:xfrm>
-          <a:prstGeom prst="roundRect">
-            <a:avLst>
-              <a:gd name="adj" fmla="val 181992"/>
-            </a:avLst>
-          </a:prstGeom>
-          <a:solidFill>
-            <a:srgbClr val="FBBF24">
-              <a:alpha val="80000"/>
-            </a:srgbClr>
-          </a:solidFill>
-          <a:ln w="12700">
-            <a:solidFill>
-              <a:srgbClr val="333333"/>
-            </a:solidFill>
-            <a:prstDash val="solid"/>
-          </a:ln>
-        </p:spPr>
-      </p:sp>
-      <p:sp>
-        <p:nvSpPr>
-          <p:cNvPr id="25" name="Text 23"/>
+          <p:cNvPr id="21" name="Text 19"/>
           <p:cNvSpPr/>
           <p:nvPr/>
         </p:nvSpPr>
@@ -2964,7 +2854,7 @@
       </p:sp>
       <p:sp>
         <p:nvSpPr>
-          <p:cNvPr id="26" name="Text 24"/>
+          <p:cNvPr id="22" name="Text 20"/>
           <p:cNvSpPr/>
           <p:nvPr/>
         </p:nvSpPr>
@@ -2984,9 +2874,6 @@
           <a:lstStyle/>
           <a:p>
             <a:pPr indent="0" marL="0">
-              <a:lnSpc>
-                <a:spcPct val="115000"/>
-              </a:lnSpc>
               <a:buNone/>
             </a:pPr>
             <a:r>
@@ -3006,7 +2893,7 @@
       </p:sp>
       <p:sp>
         <p:nvSpPr>
-          <p:cNvPr id="27" name="Shape 25"/>
+          <p:cNvPr id="23" name="Shape 21"/>
           <p:cNvSpPr/>
           <p:nvPr/>
         </p:nvSpPr>
@@ -3035,7 +2922,7 @@
       </p:sp>
       <p:sp>
         <p:nvSpPr>
-          <p:cNvPr id="28" name="Shape 26"/>
+          <p:cNvPr id="24" name="Shape 22"/>
           <p:cNvSpPr/>
           <p:nvPr/>
         </p:nvSpPr>
@@ -3057,7 +2944,7 @@
       </p:sp>
       <p:sp>
         <p:nvSpPr>
-          <p:cNvPr id="29" name="Shape 27"/>
+          <p:cNvPr id="25" name="Shape 23"/>
           <p:cNvSpPr/>
           <p:nvPr/>
         </p:nvSpPr>
@@ -3091,36 +2978,7 @@
       </p:sp>
       <p:sp>
         <p:nvSpPr>
-          <p:cNvPr id="30" name="Shape 28"/>
-          <p:cNvSpPr/>
-          <p:nvPr/>
-        </p:nvSpPr>
-        <p:spPr>
-          <a:xfrm>
-            <a:off x="796625" y="2744297"/>
-            <a:ext cx="190927" cy="190927"/>
-          </a:xfrm>
-          <a:prstGeom prst="roundRect">
-            <a:avLst>
-              <a:gd name="adj" fmla="val 181992"/>
-            </a:avLst>
-          </a:prstGeom>
-          <a:solidFill>
-            <a:srgbClr val="FBBF24">
-              <a:alpha val="80000"/>
-            </a:srgbClr>
-          </a:solidFill>
-          <a:ln w="12700">
-            <a:solidFill>
-              <a:srgbClr val="333333"/>
-            </a:solidFill>
-            <a:prstDash val="solid"/>
-          </a:ln>
-        </p:spPr>
-      </p:sp>
-      <p:sp>
-        <p:nvSpPr>
-          <p:cNvPr id="31" name="Text 29"/>
+          <p:cNvPr id="26" name="Text 24"/>
           <p:cNvSpPr/>
           <p:nvPr/>
         </p:nvSpPr>
@@ -3159,7 +3017,7 @@
       </p:sp>
       <p:sp>
         <p:nvSpPr>
-          <p:cNvPr id="32" name="Text 30"/>
+          <p:cNvPr id="27" name="Text 25"/>
           <p:cNvSpPr/>
           <p:nvPr/>
         </p:nvSpPr>
@@ -3179,9 +3037,6 @@
           <a:lstStyle/>
           <a:p>
             <a:pPr indent="0" marL="0">
-              <a:lnSpc>
-                <a:spcPct val="115000"/>
-              </a:lnSpc>
               <a:buNone/>
             </a:pPr>
             <a:r>
@@ -3201,7 +3056,7 @@
       </p:sp>
       <p:sp>
         <p:nvSpPr>
-          <p:cNvPr id="33" name="Shape 31"/>
+          <p:cNvPr id="28" name="Shape 26"/>
           <p:cNvSpPr/>
           <p:nvPr/>
         </p:nvSpPr>
@@ -3230,7 +3085,7 @@
       </p:sp>
       <p:sp>
         <p:nvSpPr>
-          <p:cNvPr id="34" name="Shape 32"/>
+          <p:cNvPr id="29" name="Shape 27"/>
           <p:cNvSpPr/>
           <p:nvPr/>
         </p:nvSpPr>
@@ -3252,7 +3107,7 @@
       </p:sp>
       <p:sp>
         <p:nvSpPr>
-          <p:cNvPr id="35" name="Shape 33"/>
+          <p:cNvPr id="30" name="Shape 28"/>
           <p:cNvSpPr/>
           <p:nvPr/>
         </p:nvSpPr>
@@ -3286,36 +3141,7 @@
       </p:sp>
       <p:sp>
         <p:nvSpPr>
-          <p:cNvPr id="36" name="Shape 34"/>
-          <p:cNvSpPr/>
-          <p:nvPr/>
-        </p:nvSpPr>
-        <p:spPr>
-          <a:xfrm>
-            <a:off x="796625" y="3366089"/>
-            <a:ext cx="190927" cy="190927"/>
-          </a:xfrm>
-          <a:prstGeom prst="roundRect">
-            <a:avLst>
-              <a:gd name="adj" fmla="val 181992"/>
-            </a:avLst>
-          </a:prstGeom>
-          <a:solidFill>
-            <a:srgbClr val="FBBF24">
-              <a:alpha val="80000"/>
-            </a:srgbClr>
-          </a:solidFill>
-          <a:ln w="12700">
-            <a:solidFill>
-              <a:srgbClr val="333333"/>
-            </a:solidFill>
-            <a:prstDash val="solid"/>
-          </a:ln>
-        </p:spPr>
-      </p:sp>
-      <p:sp>
-        <p:nvSpPr>
-          <p:cNvPr id="37" name="Text 35"/>
+          <p:cNvPr id="31" name="Text 29"/>
           <p:cNvSpPr/>
           <p:nvPr/>
         </p:nvSpPr>
@@ -3354,7 +3180,7 @@
       </p:sp>
       <p:sp>
         <p:nvSpPr>
-          <p:cNvPr id="38" name="Text 36"/>
+          <p:cNvPr id="32" name="Text 30"/>
           <p:cNvSpPr/>
           <p:nvPr/>
         </p:nvSpPr>
@@ -3374,9 +3200,6 @@
           <a:lstStyle/>
           <a:p>
             <a:pPr indent="0" marL="0">
-              <a:lnSpc>
-                <a:spcPct val="115000"/>
-              </a:lnSpc>
               <a:buNone/>
             </a:pPr>
             <a:r>
@@ -3396,7 +3219,7 @@
       </p:sp>
       <p:sp>
         <p:nvSpPr>
-          <p:cNvPr id="39" name="Shape 37"/>
+          <p:cNvPr id="33" name="Shape 31"/>
           <p:cNvSpPr/>
           <p:nvPr/>
         </p:nvSpPr>
@@ -3425,7 +3248,7 @@
       </p:sp>
       <p:sp>
         <p:nvSpPr>
-          <p:cNvPr id="40" name="Shape 38"/>
+          <p:cNvPr id="34" name="Shape 32"/>
           <p:cNvSpPr/>
           <p:nvPr/>
         </p:nvSpPr>
@@ -3447,7 +3270,7 @@
       </p:sp>
       <p:sp>
         <p:nvSpPr>
-          <p:cNvPr id="41" name="Shape 39"/>
+          <p:cNvPr id="35" name="Shape 33"/>
           <p:cNvSpPr/>
           <p:nvPr/>
         </p:nvSpPr>
@@ -3481,36 +3304,7 @@
       </p:sp>
       <p:sp>
         <p:nvSpPr>
-          <p:cNvPr id="42" name="Shape 40"/>
-          <p:cNvSpPr/>
-          <p:nvPr/>
-        </p:nvSpPr>
-        <p:spPr>
-          <a:xfrm>
-            <a:off x="796625" y="3987881"/>
-            <a:ext cx="190927" cy="190927"/>
-          </a:xfrm>
-          <a:prstGeom prst="roundRect">
-            <a:avLst>
-              <a:gd name="adj" fmla="val 181992"/>
-            </a:avLst>
-          </a:prstGeom>
-          <a:solidFill>
-            <a:srgbClr val="FBBF24">
-              <a:alpha val="80000"/>
-            </a:srgbClr>
-          </a:solidFill>
-          <a:ln w="12700">
-            <a:solidFill>
-              <a:srgbClr val="333333"/>
-            </a:solidFill>
-            <a:prstDash val="solid"/>
-          </a:ln>
-        </p:spPr>
-      </p:sp>
-      <p:sp>
-        <p:nvSpPr>
-          <p:cNvPr id="43" name="Text 41"/>
+          <p:cNvPr id="36" name="Text 34"/>
           <p:cNvSpPr/>
           <p:nvPr/>
         </p:nvSpPr>
@@ -3549,7 +3343,7 @@
       </p:sp>
       <p:sp>
         <p:nvSpPr>
-          <p:cNvPr id="44" name="Text 42"/>
+          <p:cNvPr id="37" name="Text 35"/>
           <p:cNvSpPr/>
           <p:nvPr/>
         </p:nvSpPr>
@@ -3569,9 +3363,6 @@
           <a:lstStyle/>
           <a:p>
             <a:pPr indent="0" marL="0">
-              <a:lnSpc>
-                <a:spcPct val="115000"/>
-              </a:lnSpc>
               <a:buNone/>
             </a:pPr>
             <a:r>
@@ -3591,7 +3382,7 @@
       </p:sp>
       <p:sp>
         <p:nvSpPr>
-          <p:cNvPr id="45" name="Shape 43"/>
+          <p:cNvPr id="38" name="Shape 36"/>
           <p:cNvSpPr/>
           <p:nvPr/>
         </p:nvSpPr>
@@ -3611,7 +3402,7 @@
       </p:sp>
       <p:sp>
         <p:nvSpPr>
-          <p:cNvPr id="46" name="Shape 44"/>
+          <p:cNvPr id="39" name="Shape 37"/>
           <p:cNvSpPr/>
           <p:nvPr/>
         </p:nvSpPr>
@@ -3633,7 +3424,7 @@
       </p:sp>
       <p:sp>
         <p:nvSpPr>
-          <p:cNvPr id="47" name="Shape 45"/>
+          <p:cNvPr id="40" name="Shape 38"/>
           <p:cNvSpPr/>
           <p:nvPr/>
         </p:nvSpPr>
@@ -3664,7 +3455,7 @@
       </p:sp>
       <p:sp>
         <p:nvSpPr>
-          <p:cNvPr id="48" name="Text 46"/>
+          <p:cNvPr id="41" name="Text 39"/>
           <p:cNvSpPr/>
           <p:nvPr/>
         </p:nvSpPr>
@@ -3815,55 +3606,6 @@
         </p:nvSpPr>
         <p:spPr>
           <a:xfrm>
-            <a:off x="7909560" y="201168"/>
-            <a:ext cx="685800" cy="685800"/>
-          </a:xfrm>
-          <a:prstGeom prst="ellipse">
-            <a:avLst/>
-          </a:prstGeom>
-          <a:solidFill>
-            <a:srgbClr val="ECFDF5">
-              <a:alpha val="0"/>
-            </a:srgbClr>
-          </a:solidFill>
-          <a:ln w="15875">
-            <a:solidFill>
-              <a:srgbClr val="FBBF24"/>
-            </a:solidFill>
-            <a:prstDash val="solid"/>
-          </a:ln>
-        </p:spPr>
-      </p:sp>
-      <p:sp>
-        <p:nvSpPr>
-          <p:cNvPr id="6" name="Shape 4"/>
-          <p:cNvSpPr/>
-          <p:nvPr/>
-        </p:nvSpPr>
-        <p:spPr>
-          <a:xfrm>
-            <a:off x="8183880" y="384048"/>
-            <a:ext cx="384048" cy="384048"/>
-          </a:xfrm>
-          <a:prstGeom prst="ellipse">
-            <a:avLst/>
-          </a:prstGeom>
-          <a:solidFill>
-            <a:srgbClr val="FBBF24">
-              <a:alpha val="35000"/>
-            </a:srgbClr>
-          </a:solidFill>
-          <a:ln/>
-        </p:spPr>
-      </p:sp>
-      <p:sp>
-        <p:nvSpPr>
-          <p:cNvPr id="7" name="Shape 5"/>
-          <p:cNvSpPr/>
-          <p:nvPr/>
-        </p:nvSpPr>
-        <p:spPr>
-          <a:xfrm>
             <a:off x="109728" y="0"/>
             <a:ext cx="9034272" cy="960120"/>
           </a:xfrm>
@@ -3878,7 +3620,7 @@
       </p:sp>
       <p:sp>
         <p:nvSpPr>
-          <p:cNvPr id="8" name="Shape 6"/>
+          <p:cNvPr id="6" name="Shape 4"/>
           <p:cNvSpPr/>
           <p:nvPr/>
         </p:nvSpPr>
@@ -3900,7 +3642,7 @@
       </p:sp>
       <p:sp>
         <p:nvSpPr>
-          <p:cNvPr id="9" name="Shape 7"/>
+          <p:cNvPr id="7" name="Shape 5"/>
           <p:cNvSpPr/>
           <p:nvPr/>
         </p:nvSpPr>
@@ -3922,7 +3664,7 @@
       </p:sp>
       <p:sp>
         <p:nvSpPr>
-          <p:cNvPr id="10" name="Shape 8"/>
+          <p:cNvPr id="8" name="Shape 6"/>
           <p:cNvSpPr/>
           <p:nvPr/>
         </p:nvSpPr>
@@ -3942,7 +3684,7 @@
       </p:sp>
       <p:sp>
         <p:nvSpPr>
-          <p:cNvPr id="11" name="Shape 9"/>
+          <p:cNvPr id="9" name="Shape 7"/>
           <p:cNvSpPr/>
           <p:nvPr/>
         </p:nvSpPr>
@@ -3973,7 +3715,7 @@
       </p:sp>
       <p:sp>
         <p:nvSpPr>
-          <p:cNvPr id="12" name="Text 10"/>
+          <p:cNvPr id="10" name="Text 8"/>
           <p:cNvSpPr/>
           <p:nvPr/>
         </p:nvSpPr>
@@ -4014,7 +3756,7 @@
       </p:sp>
       <p:sp>
         <p:nvSpPr>
-          <p:cNvPr id="13" name="Text 11"/>
+          <p:cNvPr id="11" name="Text 9"/>
           <p:cNvSpPr/>
           <p:nvPr/>
         </p:nvSpPr>
@@ -4053,7 +3795,7 @@
       </p:sp>
       <p:sp>
         <p:nvSpPr>
-          <p:cNvPr id="14" name="Shape 12"/>
+          <p:cNvPr id="12" name="Shape 10"/>
           <p:cNvSpPr/>
           <p:nvPr/>
         </p:nvSpPr>
@@ -4087,7 +3829,7 @@
       </p:sp>
       <p:sp>
         <p:nvSpPr>
-          <p:cNvPr id="15" name="Shape 13"/>
+          <p:cNvPr id="13" name="Shape 11"/>
           <p:cNvSpPr/>
           <p:nvPr/>
         </p:nvSpPr>
@@ -4116,7 +3858,7 @@
       </p:sp>
       <p:sp>
         <p:nvSpPr>
-          <p:cNvPr id="16" name="Shape 14"/>
+          <p:cNvPr id="14" name="Shape 12"/>
           <p:cNvSpPr/>
           <p:nvPr/>
         </p:nvSpPr>
@@ -4138,7 +3880,7 @@
       </p:sp>
       <p:sp>
         <p:nvSpPr>
-          <p:cNvPr id="17" name="Shape 15"/>
+          <p:cNvPr id="15" name="Shape 13"/>
           <p:cNvSpPr/>
           <p:nvPr/>
         </p:nvSpPr>
@@ -4172,36 +3914,7 @@
       </p:sp>
       <p:sp>
         <p:nvSpPr>
-          <p:cNvPr id="18" name="Shape 16"/>
-          <p:cNvSpPr/>
-          <p:nvPr/>
-        </p:nvSpPr>
-        <p:spPr>
-          <a:xfrm>
-            <a:off x="796625" y="1500713"/>
-            <a:ext cx="190927" cy="190927"/>
-          </a:xfrm>
-          <a:prstGeom prst="roundRect">
-            <a:avLst>
-              <a:gd name="adj" fmla="val 181992"/>
-            </a:avLst>
-          </a:prstGeom>
-          <a:solidFill>
-            <a:srgbClr val="FBBF24">
-              <a:alpha val="80000"/>
-            </a:srgbClr>
-          </a:solidFill>
-          <a:ln w="12700">
-            <a:solidFill>
-              <a:srgbClr val="333333"/>
-            </a:solidFill>
-            <a:prstDash val="solid"/>
-          </a:ln>
-        </p:spPr>
-      </p:sp>
-      <p:sp>
-        <p:nvSpPr>
-          <p:cNvPr id="19" name="Text 17"/>
+          <p:cNvPr id="16" name="Text 14"/>
           <p:cNvSpPr/>
           <p:nvPr/>
         </p:nvSpPr>
@@ -4240,7 +3953,7 @@
       </p:sp>
       <p:sp>
         <p:nvSpPr>
-          <p:cNvPr id="20" name="Text 18"/>
+          <p:cNvPr id="17" name="Text 15"/>
           <p:cNvSpPr/>
           <p:nvPr/>
         </p:nvSpPr>
@@ -4260,9 +3973,6 @@
           <a:lstStyle/>
           <a:p>
             <a:pPr indent="0" marL="0">
-              <a:lnSpc>
-                <a:spcPct val="115000"/>
-              </a:lnSpc>
               <a:buNone/>
             </a:pPr>
             <a:r>
@@ -4282,7 +3992,7 @@
       </p:sp>
       <p:sp>
         <p:nvSpPr>
-          <p:cNvPr id="21" name="Shape 19"/>
+          <p:cNvPr id="18" name="Shape 16"/>
           <p:cNvSpPr/>
           <p:nvPr/>
         </p:nvSpPr>
@@ -4311,7 +4021,7 @@
       </p:sp>
       <p:sp>
         <p:nvSpPr>
-          <p:cNvPr id="22" name="Shape 20"/>
+          <p:cNvPr id="19" name="Shape 17"/>
           <p:cNvSpPr/>
           <p:nvPr/>
         </p:nvSpPr>
@@ -4333,7 +4043,7 @@
       </p:sp>
       <p:sp>
         <p:nvSpPr>
-          <p:cNvPr id="23" name="Shape 21"/>
+          <p:cNvPr id="20" name="Shape 18"/>
           <p:cNvSpPr/>
           <p:nvPr/>
         </p:nvSpPr>
@@ -4367,36 +4077,7 @@
       </p:sp>
       <p:sp>
         <p:nvSpPr>
-          <p:cNvPr id="24" name="Shape 22"/>
-          <p:cNvSpPr/>
-          <p:nvPr/>
-        </p:nvSpPr>
-        <p:spPr>
-          <a:xfrm>
-            <a:off x="796625" y="2122505"/>
-            <a:ext cx="190927" cy="190927"/>
-          </a:xfrm>
-          <a:prstGeom prst="roundRect">
-            <a:avLst>
-              <a:gd name="adj" fmla="val 181992"/>
-            </a:avLst>
-          </a:prstGeom>
-          <a:solidFill>
-            <a:srgbClr val="FBBF24">
-              <a:alpha val="80000"/>
-            </a:srgbClr>
-          </a:solidFill>
-          <a:ln w="12700">
-            <a:solidFill>
-              <a:srgbClr val="333333"/>
-            </a:solidFill>
-            <a:prstDash val="solid"/>
-          </a:ln>
-        </p:spPr>
-      </p:sp>
-      <p:sp>
-        <p:nvSpPr>
-          <p:cNvPr id="25" name="Text 23"/>
+          <p:cNvPr id="21" name="Text 19"/>
           <p:cNvSpPr/>
           <p:nvPr/>
         </p:nvSpPr>
@@ -4435,7 +4116,7 @@
       </p:sp>
       <p:sp>
         <p:nvSpPr>
-          <p:cNvPr id="26" name="Text 24"/>
+          <p:cNvPr id="22" name="Text 20"/>
           <p:cNvSpPr/>
           <p:nvPr/>
         </p:nvSpPr>
@@ -4455,9 +4136,6 @@
           <a:lstStyle/>
           <a:p>
             <a:pPr indent="0" marL="0">
-              <a:lnSpc>
-                <a:spcPct val="115000"/>
-              </a:lnSpc>
               <a:buNone/>
             </a:pPr>
             <a:r>
@@ -4477,7 +4155,7 @@
       </p:sp>
       <p:sp>
         <p:nvSpPr>
-          <p:cNvPr id="27" name="Shape 25"/>
+          <p:cNvPr id="23" name="Shape 21"/>
           <p:cNvSpPr/>
           <p:nvPr/>
         </p:nvSpPr>
@@ -4506,7 +4184,7 @@
       </p:sp>
       <p:sp>
         <p:nvSpPr>
-          <p:cNvPr id="28" name="Shape 26"/>
+          <p:cNvPr id="24" name="Shape 22"/>
           <p:cNvSpPr/>
           <p:nvPr/>
         </p:nvSpPr>
@@ -4528,7 +4206,7 @@
       </p:sp>
       <p:sp>
         <p:nvSpPr>
-          <p:cNvPr id="29" name="Shape 27"/>
+          <p:cNvPr id="25" name="Shape 23"/>
           <p:cNvSpPr/>
           <p:nvPr/>
         </p:nvSpPr>
@@ -4562,36 +4240,7 @@
       </p:sp>
       <p:sp>
         <p:nvSpPr>
-          <p:cNvPr id="30" name="Shape 28"/>
-          <p:cNvSpPr/>
-          <p:nvPr/>
-        </p:nvSpPr>
-        <p:spPr>
-          <a:xfrm>
-            <a:off x="796625" y="2744297"/>
-            <a:ext cx="190927" cy="190927"/>
-          </a:xfrm>
-          <a:prstGeom prst="roundRect">
-            <a:avLst>
-              <a:gd name="adj" fmla="val 181992"/>
-            </a:avLst>
-          </a:prstGeom>
-          <a:solidFill>
-            <a:srgbClr val="FBBF24">
-              <a:alpha val="80000"/>
-            </a:srgbClr>
-          </a:solidFill>
-          <a:ln w="12700">
-            <a:solidFill>
-              <a:srgbClr val="333333"/>
-            </a:solidFill>
-            <a:prstDash val="solid"/>
-          </a:ln>
-        </p:spPr>
-      </p:sp>
-      <p:sp>
-        <p:nvSpPr>
-          <p:cNvPr id="31" name="Text 29"/>
+          <p:cNvPr id="26" name="Text 24"/>
           <p:cNvSpPr/>
           <p:nvPr/>
         </p:nvSpPr>
@@ -4630,7 +4279,7 @@
       </p:sp>
       <p:sp>
         <p:nvSpPr>
-          <p:cNvPr id="32" name="Text 30"/>
+          <p:cNvPr id="27" name="Text 25"/>
           <p:cNvSpPr/>
           <p:nvPr/>
         </p:nvSpPr>
@@ -4650,9 +4299,6 @@
           <a:lstStyle/>
           <a:p>
             <a:pPr indent="0" marL="0">
-              <a:lnSpc>
-                <a:spcPct val="115000"/>
-              </a:lnSpc>
               <a:buNone/>
             </a:pPr>
             <a:r>
@@ -4672,7 +4318,7 @@
       </p:sp>
       <p:sp>
         <p:nvSpPr>
-          <p:cNvPr id="33" name="Shape 31"/>
+          <p:cNvPr id="28" name="Shape 26"/>
           <p:cNvSpPr/>
           <p:nvPr/>
         </p:nvSpPr>
@@ -4701,7 +4347,7 @@
       </p:sp>
       <p:sp>
         <p:nvSpPr>
-          <p:cNvPr id="34" name="Shape 32"/>
+          <p:cNvPr id="29" name="Shape 27"/>
           <p:cNvSpPr/>
           <p:nvPr/>
         </p:nvSpPr>
@@ -4723,7 +4369,7 @@
       </p:sp>
       <p:sp>
         <p:nvSpPr>
-          <p:cNvPr id="35" name="Shape 33"/>
+          <p:cNvPr id="30" name="Shape 28"/>
           <p:cNvSpPr/>
           <p:nvPr/>
         </p:nvSpPr>
@@ -4757,36 +4403,7 @@
       </p:sp>
       <p:sp>
         <p:nvSpPr>
-          <p:cNvPr id="36" name="Shape 34"/>
-          <p:cNvSpPr/>
-          <p:nvPr/>
-        </p:nvSpPr>
-        <p:spPr>
-          <a:xfrm>
-            <a:off x="796625" y="3366089"/>
-            <a:ext cx="190927" cy="190927"/>
-          </a:xfrm>
-          <a:prstGeom prst="roundRect">
-            <a:avLst>
-              <a:gd name="adj" fmla="val 181992"/>
-            </a:avLst>
-          </a:prstGeom>
-          <a:solidFill>
-            <a:srgbClr val="FBBF24">
-              <a:alpha val="80000"/>
-            </a:srgbClr>
-          </a:solidFill>
-          <a:ln w="12700">
-            <a:solidFill>
-              <a:srgbClr val="333333"/>
-            </a:solidFill>
-            <a:prstDash val="solid"/>
-          </a:ln>
-        </p:spPr>
-      </p:sp>
-      <p:sp>
-        <p:nvSpPr>
-          <p:cNvPr id="37" name="Text 35"/>
+          <p:cNvPr id="31" name="Text 29"/>
           <p:cNvSpPr/>
           <p:nvPr/>
         </p:nvSpPr>
@@ -4825,7 +4442,7 @@
       </p:sp>
       <p:sp>
         <p:nvSpPr>
-          <p:cNvPr id="38" name="Text 36"/>
+          <p:cNvPr id="32" name="Text 30"/>
           <p:cNvSpPr/>
           <p:nvPr/>
         </p:nvSpPr>
@@ -4845,9 +4462,6 @@
           <a:lstStyle/>
           <a:p>
             <a:pPr indent="0" marL="0">
-              <a:lnSpc>
-                <a:spcPct val="115000"/>
-              </a:lnSpc>
               <a:buNone/>
             </a:pPr>
             <a:r>
@@ -4867,7 +4481,7 @@
       </p:sp>
       <p:sp>
         <p:nvSpPr>
-          <p:cNvPr id="39" name="Shape 37"/>
+          <p:cNvPr id="33" name="Shape 31"/>
           <p:cNvSpPr/>
           <p:nvPr/>
         </p:nvSpPr>
@@ -4896,7 +4510,7 @@
       </p:sp>
       <p:sp>
         <p:nvSpPr>
-          <p:cNvPr id="40" name="Shape 38"/>
+          <p:cNvPr id="34" name="Shape 32"/>
           <p:cNvSpPr/>
           <p:nvPr/>
         </p:nvSpPr>
@@ -4918,7 +4532,7 @@
       </p:sp>
       <p:sp>
         <p:nvSpPr>
-          <p:cNvPr id="41" name="Shape 39"/>
+          <p:cNvPr id="35" name="Shape 33"/>
           <p:cNvSpPr/>
           <p:nvPr/>
         </p:nvSpPr>
@@ -4952,36 +4566,7 @@
       </p:sp>
       <p:sp>
         <p:nvSpPr>
-          <p:cNvPr id="42" name="Shape 40"/>
-          <p:cNvSpPr/>
-          <p:nvPr/>
-        </p:nvSpPr>
-        <p:spPr>
-          <a:xfrm>
-            <a:off x="796625" y="3987881"/>
-            <a:ext cx="190927" cy="190927"/>
-          </a:xfrm>
-          <a:prstGeom prst="roundRect">
-            <a:avLst>
-              <a:gd name="adj" fmla="val 181992"/>
-            </a:avLst>
-          </a:prstGeom>
-          <a:solidFill>
-            <a:srgbClr val="FBBF24">
-              <a:alpha val="80000"/>
-            </a:srgbClr>
-          </a:solidFill>
-          <a:ln w="12700">
-            <a:solidFill>
-              <a:srgbClr val="333333"/>
-            </a:solidFill>
-            <a:prstDash val="solid"/>
-          </a:ln>
-        </p:spPr>
-      </p:sp>
-      <p:sp>
-        <p:nvSpPr>
-          <p:cNvPr id="43" name="Text 41"/>
+          <p:cNvPr id="36" name="Text 34"/>
           <p:cNvSpPr/>
           <p:nvPr/>
         </p:nvSpPr>
@@ -5020,7 +4605,7 @@
       </p:sp>
       <p:sp>
         <p:nvSpPr>
-          <p:cNvPr id="44" name="Text 42"/>
+          <p:cNvPr id="37" name="Text 35"/>
           <p:cNvSpPr/>
           <p:nvPr/>
         </p:nvSpPr>
@@ -5040,9 +4625,6 @@
           <a:lstStyle/>
           <a:p>
             <a:pPr indent="0" marL="0">
-              <a:lnSpc>
-                <a:spcPct val="115000"/>
-              </a:lnSpc>
               <a:buNone/>
             </a:pPr>
             <a:r>
@@ -5062,7 +4644,7 @@
       </p:sp>
       <p:sp>
         <p:nvSpPr>
-          <p:cNvPr id="45" name="Shape 43"/>
+          <p:cNvPr id="38" name="Shape 36"/>
           <p:cNvSpPr/>
           <p:nvPr/>
         </p:nvSpPr>
@@ -5082,7 +4664,7 @@
       </p:sp>
       <p:sp>
         <p:nvSpPr>
-          <p:cNvPr id="46" name="Shape 44"/>
+          <p:cNvPr id="39" name="Shape 37"/>
           <p:cNvSpPr/>
           <p:nvPr/>
         </p:nvSpPr>
@@ -5104,7 +4686,7 @@
       </p:sp>
       <p:sp>
         <p:nvSpPr>
-          <p:cNvPr id="47" name="Shape 45"/>
+          <p:cNvPr id="40" name="Shape 38"/>
           <p:cNvSpPr/>
           <p:nvPr/>
         </p:nvSpPr>
@@ -5135,7 +4717,7 @@
       </p:sp>
       <p:sp>
         <p:nvSpPr>
-          <p:cNvPr id="48" name="Text 46"/>
+          <p:cNvPr id="41" name="Text 39"/>
           <p:cNvSpPr/>
           <p:nvPr/>
         </p:nvSpPr>
@@ -5286,55 +4868,6 @@
         </p:nvSpPr>
         <p:spPr>
           <a:xfrm>
-            <a:off x="7909560" y="201168"/>
-            <a:ext cx="685800" cy="685800"/>
-          </a:xfrm>
-          <a:prstGeom prst="ellipse">
-            <a:avLst/>
-          </a:prstGeom>
-          <a:solidFill>
-            <a:srgbClr val="ECFDF5">
-              <a:alpha val="0"/>
-            </a:srgbClr>
-          </a:solidFill>
-          <a:ln w="15875">
-            <a:solidFill>
-              <a:srgbClr val="FBBF24"/>
-            </a:solidFill>
-            <a:prstDash val="solid"/>
-          </a:ln>
-        </p:spPr>
-      </p:sp>
-      <p:sp>
-        <p:nvSpPr>
-          <p:cNvPr id="6" name="Shape 4"/>
-          <p:cNvSpPr/>
-          <p:nvPr/>
-        </p:nvSpPr>
-        <p:spPr>
-          <a:xfrm>
-            <a:off x="8183880" y="384048"/>
-            <a:ext cx="384048" cy="384048"/>
-          </a:xfrm>
-          <a:prstGeom prst="ellipse">
-            <a:avLst/>
-          </a:prstGeom>
-          <a:solidFill>
-            <a:srgbClr val="FBBF24">
-              <a:alpha val="35000"/>
-            </a:srgbClr>
-          </a:solidFill>
-          <a:ln/>
-        </p:spPr>
-      </p:sp>
-      <p:sp>
-        <p:nvSpPr>
-          <p:cNvPr id="7" name="Shape 5"/>
-          <p:cNvSpPr/>
-          <p:nvPr/>
-        </p:nvSpPr>
-        <p:spPr>
-          <a:xfrm>
             <a:off x="109728" y="0"/>
             <a:ext cx="9034272" cy="960120"/>
           </a:xfrm>
@@ -5349,7 +4882,7 @@
       </p:sp>
       <p:sp>
         <p:nvSpPr>
-          <p:cNvPr id="8" name="Shape 6"/>
+          <p:cNvPr id="6" name="Shape 4"/>
           <p:cNvSpPr/>
           <p:nvPr/>
         </p:nvSpPr>
@@ -5371,7 +4904,7 @@
       </p:sp>
       <p:sp>
         <p:nvSpPr>
-          <p:cNvPr id="9" name="Shape 7"/>
+          <p:cNvPr id="7" name="Shape 5"/>
           <p:cNvSpPr/>
           <p:nvPr/>
         </p:nvSpPr>
@@ -5393,7 +4926,7 @@
       </p:sp>
       <p:sp>
         <p:nvSpPr>
-          <p:cNvPr id="10" name="Shape 8"/>
+          <p:cNvPr id="8" name="Shape 6"/>
           <p:cNvSpPr/>
           <p:nvPr/>
         </p:nvSpPr>
@@ -5413,7 +4946,7 @@
       </p:sp>
       <p:sp>
         <p:nvSpPr>
-          <p:cNvPr id="11" name="Shape 9"/>
+          <p:cNvPr id="9" name="Shape 7"/>
           <p:cNvSpPr/>
           <p:nvPr/>
         </p:nvSpPr>
@@ -5444,7 +4977,7 @@
       </p:sp>
       <p:sp>
         <p:nvSpPr>
-          <p:cNvPr id="12" name="Text 10"/>
+          <p:cNvPr id="10" name="Text 8"/>
           <p:cNvSpPr/>
           <p:nvPr/>
         </p:nvSpPr>
@@ -5485,7 +5018,7 @@
       </p:sp>
       <p:sp>
         <p:nvSpPr>
-          <p:cNvPr id="13" name="Text 11"/>
+          <p:cNvPr id="11" name="Text 9"/>
           <p:cNvSpPr/>
           <p:nvPr/>
         </p:nvSpPr>
@@ -5524,7 +5057,7 @@
       </p:sp>
       <p:sp>
         <p:nvSpPr>
-          <p:cNvPr id="14" name="Shape 12"/>
+          <p:cNvPr id="12" name="Shape 10"/>
           <p:cNvSpPr/>
           <p:nvPr/>
         </p:nvSpPr>
@@ -5558,7 +5091,7 @@
       </p:sp>
       <p:sp>
         <p:nvSpPr>
-          <p:cNvPr id="15" name="Shape 13"/>
+          <p:cNvPr id="13" name="Shape 11"/>
           <p:cNvSpPr/>
           <p:nvPr/>
         </p:nvSpPr>
@@ -5587,7 +5120,7 @@
       </p:sp>
       <p:sp>
         <p:nvSpPr>
-          <p:cNvPr id="16" name="Shape 14"/>
+          <p:cNvPr id="14" name="Shape 12"/>
           <p:cNvSpPr/>
           <p:nvPr/>
         </p:nvSpPr>
@@ -5609,7 +5142,7 @@
       </p:sp>
       <p:sp>
         <p:nvSpPr>
-          <p:cNvPr id="17" name="Shape 15"/>
+          <p:cNvPr id="15" name="Shape 13"/>
           <p:cNvSpPr/>
           <p:nvPr/>
         </p:nvSpPr>
@@ -5643,36 +5176,7 @@
       </p:sp>
       <p:sp>
         <p:nvSpPr>
-          <p:cNvPr id="18" name="Shape 16"/>
-          <p:cNvSpPr/>
-          <p:nvPr/>
-        </p:nvSpPr>
-        <p:spPr>
-          <a:xfrm>
-            <a:off x="796625" y="1500713"/>
-            <a:ext cx="190927" cy="190927"/>
-          </a:xfrm>
-          <a:prstGeom prst="roundRect">
-            <a:avLst>
-              <a:gd name="adj" fmla="val 181992"/>
-            </a:avLst>
-          </a:prstGeom>
-          <a:solidFill>
-            <a:srgbClr val="FBBF24">
-              <a:alpha val="80000"/>
-            </a:srgbClr>
-          </a:solidFill>
-          <a:ln w="12700">
-            <a:solidFill>
-              <a:srgbClr val="333333"/>
-            </a:solidFill>
-            <a:prstDash val="solid"/>
-          </a:ln>
-        </p:spPr>
-      </p:sp>
-      <p:sp>
-        <p:nvSpPr>
-          <p:cNvPr id="19" name="Text 17"/>
+          <p:cNvPr id="16" name="Text 14"/>
           <p:cNvSpPr/>
           <p:nvPr/>
         </p:nvSpPr>
@@ -5711,7 +5215,7 @@
       </p:sp>
       <p:sp>
         <p:nvSpPr>
-          <p:cNvPr id="20" name="Text 18"/>
+          <p:cNvPr id="17" name="Text 15"/>
           <p:cNvSpPr/>
           <p:nvPr/>
         </p:nvSpPr>
@@ -5731,9 +5235,6 @@
           <a:lstStyle/>
           <a:p>
             <a:pPr indent="0" marL="0">
-              <a:lnSpc>
-                <a:spcPct val="115000"/>
-              </a:lnSpc>
               <a:buNone/>
             </a:pPr>
             <a:r>
@@ -5753,7 +5254,7 @@
       </p:sp>
       <p:sp>
         <p:nvSpPr>
-          <p:cNvPr id="21" name="Shape 19"/>
+          <p:cNvPr id="18" name="Shape 16"/>
           <p:cNvSpPr/>
           <p:nvPr/>
         </p:nvSpPr>
@@ -5782,7 +5283,7 @@
       </p:sp>
       <p:sp>
         <p:nvSpPr>
-          <p:cNvPr id="22" name="Shape 20"/>
+          <p:cNvPr id="19" name="Shape 17"/>
           <p:cNvSpPr/>
           <p:nvPr/>
         </p:nvSpPr>
@@ -5804,7 +5305,7 @@
       </p:sp>
       <p:sp>
         <p:nvSpPr>
-          <p:cNvPr id="23" name="Shape 21"/>
+          <p:cNvPr id="20" name="Shape 18"/>
           <p:cNvSpPr/>
           <p:nvPr/>
         </p:nvSpPr>
@@ -5838,36 +5339,7 @@
       </p:sp>
       <p:sp>
         <p:nvSpPr>
-          <p:cNvPr id="24" name="Shape 22"/>
-          <p:cNvSpPr/>
-          <p:nvPr/>
-        </p:nvSpPr>
-        <p:spPr>
-          <a:xfrm>
-            <a:off x="796625" y="2122505"/>
-            <a:ext cx="190927" cy="190927"/>
-          </a:xfrm>
-          <a:prstGeom prst="roundRect">
-            <a:avLst>
-              <a:gd name="adj" fmla="val 181992"/>
-            </a:avLst>
-          </a:prstGeom>
-          <a:solidFill>
-            <a:srgbClr val="FBBF24">
-              <a:alpha val="80000"/>
-            </a:srgbClr>
-          </a:solidFill>
-          <a:ln w="12700">
-            <a:solidFill>
-              <a:srgbClr val="333333"/>
-            </a:solidFill>
-            <a:prstDash val="solid"/>
-          </a:ln>
-        </p:spPr>
-      </p:sp>
-      <p:sp>
-        <p:nvSpPr>
-          <p:cNvPr id="25" name="Text 23"/>
+          <p:cNvPr id="21" name="Text 19"/>
           <p:cNvSpPr/>
           <p:nvPr/>
         </p:nvSpPr>
@@ -5906,7 +5378,7 @@
       </p:sp>
       <p:sp>
         <p:nvSpPr>
-          <p:cNvPr id="26" name="Text 24"/>
+          <p:cNvPr id="22" name="Text 20"/>
           <p:cNvSpPr/>
           <p:nvPr/>
         </p:nvSpPr>
@@ -5926,9 +5398,6 @@
           <a:lstStyle/>
           <a:p>
             <a:pPr indent="0" marL="0">
-              <a:lnSpc>
-                <a:spcPct val="115000"/>
-              </a:lnSpc>
               <a:buNone/>
             </a:pPr>
             <a:r>
@@ -5948,7 +5417,7 @@
       </p:sp>
       <p:sp>
         <p:nvSpPr>
-          <p:cNvPr id="27" name="Shape 25"/>
+          <p:cNvPr id="23" name="Shape 21"/>
           <p:cNvSpPr/>
           <p:nvPr/>
         </p:nvSpPr>
@@ -5977,7 +5446,7 @@
       </p:sp>
       <p:sp>
         <p:nvSpPr>
-          <p:cNvPr id="28" name="Shape 26"/>
+          <p:cNvPr id="24" name="Shape 22"/>
           <p:cNvSpPr/>
           <p:nvPr/>
         </p:nvSpPr>
@@ -5999,7 +5468,7 @@
       </p:sp>
       <p:sp>
         <p:nvSpPr>
-          <p:cNvPr id="29" name="Shape 27"/>
+          <p:cNvPr id="25" name="Shape 23"/>
           <p:cNvSpPr/>
           <p:nvPr/>
         </p:nvSpPr>
@@ -6033,36 +5502,7 @@
       </p:sp>
       <p:sp>
         <p:nvSpPr>
-          <p:cNvPr id="30" name="Shape 28"/>
-          <p:cNvSpPr/>
-          <p:nvPr/>
-        </p:nvSpPr>
-        <p:spPr>
-          <a:xfrm>
-            <a:off x="796625" y="2744297"/>
-            <a:ext cx="190927" cy="190927"/>
-          </a:xfrm>
-          <a:prstGeom prst="roundRect">
-            <a:avLst>
-              <a:gd name="adj" fmla="val 181992"/>
-            </a:avLst>
-          </a:prstGeom>
-          <a:solidFill>
-            <a:srgbClr val="FBBF24">
-              <a:alpha val="80000"/>
-            </a:srgbClr>
-          </a:solidFill>
-          <a:ln w="12700">
-            <a:solidFill>
-              <a:srgbClr val="333333"/>
-            </a:solidFill>
-            <a:prstDash val="solid"/>
-          </a:ln>
-        </p:spPr>
-      </p:sp>
-      <p:sp>
-        <p:nvSpPr>
-          <p:cNvPr id="31" name="Text 29"/>
+          <p:cNvPr id="26" name="Text 24"/>
           <p:cNvSpPr/>
           <p:nvPr/>
         </p:nvSpPr>
@@ -6101,7 +5541,7 @@
       </p:sp>
       <p:sp>
         <p:nvSpPr>
-          <p:cNvPr id="32" name="Text 30"/>
+          <p:cNvPr id="27" name="Text 25"/>
           <p:cNvSpPr/>
           <p:nvPr/>
         </p:nvSpPr>
@@ -6121,9 +5561,6 @@
           <a:lstStyle/>
           <a:p>
             <a:pPr indent="0" marL="0">
-              <a:lnSpc>
-                <a:spcPct val="115000"/>
-              </a:lnSpc>
               <a:buNone/>
             </a:pPr>
             <a:r>
@@ -6143,7 +5580,7 @@
       </p:sp>
       <p:sp>
         <p:nvSpPr>
-          <p:cNvPr id="33" name="Shape 31"/>
+          <p:cNvPr id="28" name="Shape 26"/>
           <p:cNvSpPr/>
           <p:nvPr/>
         </p:nvSpPr>
@@ -6172,7 +5609,7 @@
       </p:sp>
       <p:sp>
         <p:nvSpPr>
-          <p:cNvPr id="34" name="Shape 32"/>
+          <p:cNvPr id="29" name="Shape 27"/>
           <p:cNvSpPr/>
           <p:nvPr/>
         </p:nvSpPr>
@@ -6194,7 +5631,7 @@
       </p:sp>
       <p:sp>
         <p:nvSpPr>
-          <p:cNvPr id="35" name="Shape 33"/>
+          <p:cNvPr id="30" name="Shape 28"/>
           <p:cNvSpPr/>
           <p:nvPr/>
         </p:nvSpPr>
@@ -6228,36 +5665,7 @@
       </p:sp>
       <p:sp>
         <p:nvSpPr>
-          <p:cNvPr id="36" name="Shape 34"/>
-          <p:cNvSpPr/>
-          <p:nvPr/>
-        </p:nvSpPr>
-        <p:spPr>
-          <a:xfrm>
-            <a:off x="796625" y="3366089"/>
-            <a:ext cx="190927" cy="190927"/>
-          </a:xfrm>
-          <a:prstGeom prst="roundRect">
-            <a:avLst>
-              <a:gd name="adj" fmla="val 181992"/>
-            </a:avLst>
-          </a:prstGeom>
-          <a:solidFill>
-            <a:srgbClr val="FBBF24">
-              <a:alpha val="80000"/>
-            </a:srgbClr>
-          </a:solidFill>
-          <a:ln w="12700">
-            <a:solidFill>
-              <a:srgbClr val="333333"/>
-            </a:solidFill>
-            <a:prstDash val="solid"/>
-          </a:ln>
-        </p:spPr>
-      </p:sp>
-      <p:sp>
-        <p:nvSpPr>
-          <p:cNvPr id="37" name="Text 35"/>
+          <p:cNvPr id="31" name="Text 29"/>
           <p:cNvSpPr/>
           <p:nvPr/>
         </p:nvSpPr>
@@ -6296,7 +5704,7 @@
       </p:sp>
       <p:sp>
         <p:nvSpPr>
-          <p:cNvPr id="38" name="Text 36"/>
+          <p:cNvPr id="32" name="Text 30"/>
           <p:cNvSpPr/>
           <p:nvPr/>
         </p:nvSpPr>
@@ -6316,9 +5724,6 @@
           <a:lstStyle/>
           <a:p>
             <a:pPr indent="0" marL="0">
-              <a:lnSpc>
-                <a:spcPct val="115000"/>
-              </a:lnSpc>
               <a:buNone/>
             </a:pPr>
             <a:r>
@@ -6338,7 +5743,7 @@
       </p:sp>
       <p:sp>
         <p:nvSpPr>
-          <p:cNvPr id="39" name="Shape 37"/>
+          <p:cNvPr id="33" name="Shape 31"/>
           <p:cNvSpPr/>
           <p:nvPr/>
         </p:nvSpPr>
@@ -6367,7 +5772,7 @@
       </p:sp>
       <p:sp>
         <p:nvSpPr>
-          <p:cNvPr id="40" name="Shape 38"/>
+          <p:cNvPr id="34" name="Shape 32"/>
           <p:cNvSpPr/>
           <p:nvPr/>
         </p:nvSpPr>
@@ -6389,7 +5794,7 @@
       </p:sp>
       <p:sp>
         <p:nvSpPr>
-          <p:cNvPr id="41" name="Shape 39"/>
+          <p:cNvPr id="35" name="Shape 33"/>
           <p:cNvSpPr/>
           <p:nvPr/>
         </p:nvSpPr>
@@ -6423,36 +5828,7 @@
       </p:sp>
       <p:sp>
         <p:nvSpPr>
-          <p:cNvPr id="42" name="Shape 40"/>
-          <p:cNvSpPr/>
-          <p:nvPr/>
-        </p:nvSpPr>
-        <p:spPr>
-          <a:xfrm>
-            <a:off x="796625" y="3987881"/>
-            <a:ext cx="190927" cy="190927"/>
-          </a:xfrm>
-          <a:prstGeom prst="roundRect">
-            <a:avLst>
-              <a:gd name="adj" fmla="val 181992"/>
-            </a:avLst>
-          </a:prstGeom>
-          <a:solidFill>
-            <a:srgbClr val="FBBF24">
-              <a:alpha val="80000"/>
-            </a:srgbClr>
-          </a:solidFill>
-          <a:ln w="12700">
-            <a:solidFill>
-              <a:srgbClr val="333333"/>
-            </a:solidFill>
-            <a:prstDash val="solid"/>
-          </a:ln>
-        </p:spPr>
-      </p:sp>
-      <p:sp>
-        <p:nvSpPr>
-          <p:cNvPr id="43" name="Text 41"/>
+          <p:cNvPr id="36" name="Text 34"/>
           <p:cNvSpPr/>
           <p:nvPr/>
         </p:nvSpPr>
@@ -6491,7 +5867,7 @@
       </p:sp>
       <p:sp>
         <p:nvSpPr>
-          <p:cNvPr id="44" name="Text 42"/>
+          <p:cNvPr id="37" name="Text 35"/>
           <p:cNvSpPr/>
           <p:nvPr/>
         </p:nvSpPr>
@@ -6511,9 +5887,6 @@
           <a:lstStyle/>
           <a:p>
             <a:pPr indent="0" marL="0">
-              <a:lnSpc>
-                <a:spcPct val="115000"/>
-              </a:lnSpc>
               <a:buNone/>
             </a:pPr>
             <a:r>
@@ -6533,7 +5906,7 @@
       </p:sp>
       <p:sp>
         <p:nvSpPr>
-          <p:cNvPr id="45" name="Shape 43"/>
+          <p:cNvPr id="38" name="Shape 36"/>
           <p:cNvSpPr/>
           <p:nvPr/>
         </p:nvSpPr>
@@ -6553,7 +5926,7 @@
       </p:sp>
       <p:sp>
         <p:nvSpPr>
-          <p:cNvPr id="46" name="Shape 44"/>
+          <p:cNvPr id="39" name="Shape 37"/>
           <p:cNvSpPr/>
           <p:nvPr/>
         </p:nvSpPr>
@@ -6575,7 +5948,7 @@
       </p:sp>
       <p:sp>
         <p:nvSpPr>
-          <p:cNvPr id="47" name="Shape 45"/>
+          <p:cNvPr id="40" name="Shape 38"/>
           <p:cNvSpPr/>
           <p:nvPr/>
         </p:nvSpPr>
@@ -6606,7 +5979,7 @@
       </p:sp>
       <p:sp>
         <p:nvSpPr>
-          <p:cNvPr id="48" name="Text 46"/>
+          <p:cNvPr id="41" name="Text 39"/>
           <p:cNvSpPr/>
           <p:nvPr/>
         </p:nvSpPr>
@@ -7167,55 +6540,6 @@
         </p:nvSpPr>
         <p:spPr>
           <a:xfrm>
-            <a:off x="7909560" y="201168"/>
-            <a:ext cx="685800" cy="685800"/>
-          </a:xfrm>
-          <a:prstGeom prst="ellipse">
-            <a:avLst/>
-          </a:prstGeom>
-          <a:solidFill>
-            <a:srgbClr val="ECFDF5">
-              <a:alpha val="0"/>
-            </a:srgbClr>
-          </a:solidFill>
-          <a:ln w="15875">
-            <a:solidFill>
-              <a:srgbClr val="FBBF24"/>
-            </a:solidFill>
-            <a:prstDash val="solid"/>
-          </a:ln>
-        </p:spPr>
-      </p:sp>
-      <p:sp>
-        <p:nvSpPr>
-          <p:cNvPr id="6" name="Shape 4"/>
-          <p:cNvSpPr/>
-          <p:nvPr/>
-        </p:nvSpPr>
-        <p:spPr>
-          <a:xfrm>
-            <a:off x="8183880" y="384048"/>
-            <a:ext cx="384048" cy="384048"/>
-          </a:xfrm>
-          <a:prstGeom prst="ellipse">
-            <a:avLst/>
-          </a:prstGeom>
-          <a:solidFill>
-            <a:srgbClr val="FBBF24">
-              <a:alpha val="35000"/>
-            </a:srgbClr>
-          </a:solidFill>
-          <a:ln/>
-        </p:spPr>
-      </p:sp>
-      <p:sp>
-        <p:nvSpPr>
-          <p:cNvPr id="7" name="Shape 5"/>
-          <p:cNvSpPr/>
-          <p:nvPr/>
-        </p:nvSpPr>
-        <p:spPr>
-          <a:xfrm>
             <a:off x="109728" y="0"/>
             <a:ext cx="9034272" cy="960120"/>
           </a:xfrm>
@@ -7230,7 +6554,7 @@
       </p:sp>
       <p:sp>
         <p:nvSpPr>
-          <p:cNvPr id="8" name="Shape 6"/>
+          <p:cNvPr id="6" name="Shape 4"/>
           <p:cNvSpPr/>
           <p:nvPr/>
         </p:nvSpPr>
@@ -7252,7 +6576,7 @@
       </p:sp>
       <p:sp>
         <p:nvSpPr>
-          <p:cNvPr id="9" name="Shape 7"/>
+          <p:cNvPr id="7" name="Shape 5"/>
           <p:cNvSpPr/>
           <p:nvPr/>
         </p:nvSpPr>
@@ -7274,7 +6598,7 @@
       </p:sp>
       <p:sp>
         <p:nvSpPr>
-          <p:cNvPr id="10" name="Shape 8"/>
+          <p:cNvPr id="8" name="Shape 6"/>
           <p:cNvSpPr/>
           <p:nvPr/>
         </p:nvSpPr>
@@ -7294,7 +6618,7 @@
       </p:sp>
       <p:sp>
         <p:nvSpPr>
-          <p:cNvPr id="11" name="Shape 9"/>
+          <p:cNvPr id="9" name="Shape 7"/>
           <p:cNvSpPr/>
           <p:nvPr/>
         </p:nvSpPr>
@@ -7325,7 +6649,7 @@
       </p:sp>
       <p:sp>
         <p:nvSpPr>
-          <p:cNvPr id="12" name="Text 10"/>
+          <p:cNvPr id="10" name="Text 8"/>
           <p:cNvSpPr/>
           <p:nvPr/>
         </p:nvSpPr>
@@ -7366,7 +6690,7 @@
       </p:sp>
       <p:sp>
         <p:nvSpPr>
-          <p:cNvPr id="13" name="Text 11"/>
+          <p:cNvPr id="11" name="Text 9"/>
           <p:cNvSpPr/>
           <p:nvPr/>
         </p:nvSpPr>
@@ -7405,7 +6729,7 @@
       </p:sp>
       <p:sp>
         <p:nvSpPr>
-          <p:cNvPr id="14" name="Shape 12"/>
+          <p:cNvPr id="12" name="Shape 10"/>
           <p:cNvSpPr/>
           <p:nvPr/>
         </p:nvSpPr>
@@ -7439,7 +6763,7 @@
       </p:sp>
       <p:sp>
         <p:nvSpPr>
-          <p:cNvPr id="15" name="Shape 13"/>
+          <p:cNvPr id="13" name="Shape 11"/>
           <p:cNvSpPr/>
           <p:nvPr/>
         </p:nvSpPr>
@@ -7468,7 +6792,7 @@
       </p:sp>
       <p:sp>
         <p:nvSpPr>
-          <p:cNvPr id="16" name="Shape 14"/>
+          <p:cNvPr id="14" name="Shape 12"/>
           <p:cNvSpPr/>
           <p:nvPr/>
         </p:nvSpPr>
@@ -7490,7 +6814,7 @@
       </p:sp>
       <p:sp>
         <p:nvSpPr>
-          <p:cNvPr id="17" name="Shape 15"/>
+          <p:cNvPr id="15" name="Shape 13"/>
           <p:cNvSpPr/>
           <p:nvPr/>
         </p:nvSpPr>
@@ -7524,36 +6848,7 @@
       </p:sp>
       <p:sp>
         <p:nvSpPr>
-          <p:cNvPr id="18" name="Shape 16"/>
-          <p:cNvSpPr/>
-          <p:nvPr/>
-        </p:nvSpPr>
-        <p:spPr>
-          <a:xfrm>
-            <a:off x="796625" y="1500713"/>
-            <a:ext cx="190927" cy="190927"/>
-          </a:xfrm>
-          <a:prstGeom prst="roundRect">
-            <a:avLst>
-              <a:gd name="adj" fmla="val 181992"/>
-            </a:avLst>
-          </a:prstGeom>
-          <a:solidFill>
-            <a:srgbClr val="FBBF24">
-              <a:alpha val="80000"/>
-            </a:srgbClr>
-          </a:solidFill>
-          <a:ln w="12700">
-            <a:solidFill>
-              <a:srgbClr val="333333"/>
-            </a:solidFill>
-            <a:prstDash val="solid"/>
-          </a:ln>
-        </p:spPr>
-      </p:sp>
-      <p:sp>
-        <p:nvSpPr>
-          <p:cNvPr id="19" name="Text 17"/>
+          <p:cNvPr id="16" name="Text 14"/>
           <p:cNvSpPr/>
           <p:nvPr/>
         </p:nvSpPr>
@@ -7592,7 +6887,7 @@
       </p:sp>
       <p:sp>
         <p:nvSpPr>
-          <p:cNvPr id="20" name="Text 18"/>
+          <p:cNvPr id="17" name="Text 15"/>
           <p:cNvSpPr/>
           <p:nvPr/>
         </p:nvSpPr>
@@ -7612,9 +6907,6 @@
           <a:lstStyle/>
           <a:p>
             <a:pPr indent="0" marL="0">
-              <a:lnSpc>
-                <a:spcPct val="115000"/>
-              </a:lnSpc>
               <a:buNone/>
             </a:pPr>
             <a:r>
@@ -7634,7 +6926,7 @@
       </p:sp>
       <p:sp>
         <p:nvSpPr>
-          <p:cNvPr id="21" name="Shape 19"/>
+          <p:cNvPr id="18" name="Shape 16"/>
           <p:cNvSpPr/>
           <p:nvPr/>
         </p:nvSpPr>
@@ -7663,7 +6955,7 @@
       </p:sp>
       <p:sp>
         <p:nvSpPr>
-          <p:cNvPr id="22" name="Shape 20"/>
+          <p:cNvPr id="19" name="Shape 17"/>
           <p:cNvSpPr/>
           <p:nvPr/>
         </p:nvSpPr>
@@ -7685,7 +6977,7 @@
       </p:sp>
       <p:sp>
         <p:nvSpPr>
-          <p:cNvPr id="23" name="Shape 21"/>
+          <p:cNvPr id="20" name="Shape 18"/>
           <p:cNvSpPr/>
           <p:nvPr/>
         </p:nvSpPr>
@@ -7719,36 +7011,7 @@
       </p:sp>
       <p:sp>
         <p:nvSpPr>
-          <p:cNvPr id="24" name="Shape 22"/>
-          <p:cNvSpPr/>
-          <p:nvPr/>
-        </p:nvSpPr>
-        <p:spPr>
-          <a:xfrm>
-            <a:off x="796625" y="2122505"/>
-            <a:ext cx="190927" cy="190927"/>
-          </a:xfrm>
-          <a:prstGeom prst="roundRect">
-            <a:avLst>
-              <a:gd name="adj" fmla="val 181992"/>
-            </a:avLst>
-          </a:prstGeom>
-          <a:solidFill>
-            <a:srgbClr val="FBBF24">
-              <a:alpha val="80000"/>
-            </a:srgbClr>
-          </a:solidFill>
-          <a:ln w="12700">
-            <a:solidFill>
-              <a:srgbClr val="333333"/>
-            </a:solidFill>
-            <a:prstDash val="solid"/>
-          </a:ln>
-        </p:spPr>
-      </p:sp>
-      <p:sp>
-        <p:nvSpPr>
-          <p:cNvPr id="25" name="Text 23"/>
+          <p:cNvPr id="21" name="Text 19"/>
           <p:cNvSpPr/>
           <p:nvPr/>
         </p:nvSpPr>
@@ -7787,7 +7050,7 @@
       </p:sp>
       <p:sp>
         <p:nvSpPr>
-          <p:cNvPr id="26" name="Text 24"/>
+          <p:cNvPr id="22" name="Text 20"/>
           <p:cNvSpPr/>
           <p:nvPr/>
         </p:nvSpPr>
@@ -7807,9 +7070,6 @@
           <a:lstStyle/>
           <a:p>
             <a:pPr indent="0" marL="0">
-              <a:lnSpc>
-                <a:spcPct val="115000"/>
-              </a:lnSpc>
               <a:buNone/>
             </a:pPr>
             <a:r>
@@ -7829,7 +7089,7 @@
       </p:sp>
       <p:sp>
         <p:nvSpPr>
-          <p:cNvPr id="27" name="Shape 25"/>
+          <p:cNvPr id="23" name="Shape 21"/>
           <p:cNvSpPr/>
           <p:nvPr/>
         </p:nvSpPr>
@@ -7858,7 +7118,7 @@
       </p:sp>
       <p:sp>
         <p:nvSpPr>
-          <p:cNvPr id="28" name="Shape 26"/>
+          <p:cNvPr id="24" name="Shape 22"/>
           <p:cNvSpPr/>
           <p:nvPr/>
         </p:nvSpPr>
@@ -7880,7 +7140,7 @@
       </p:sp>
       <p:sp>
         <p:nvSpPr>
-          <p:cNvPr id="29" name="Shape 27"/>
+          <p:cNvPr id="25" name="Shape 23"/>
           <p:cNvSpPr/>
           <p:nvPr/>
         </p:nvSpPr>
@@ -7914,36 +7174,7 @@
       </p:sp>
       <p:sp>
         <p:nvSpPr>
-          <p:cNvPr id="30" name="Shape 28"/>
-          <p:cNvSpPr/>
-          <p:nvPr/>
-        </p:nvSpPr>
-        <p:spPr>
-          <a:xfrm>
-            <a:off x="796625" y="2744297"/>
-            <a:ext cx="190927" cy="190927"/>
-          </a:xfrm>
-          <a:prstGeom prst="roundRect">
-            <a:avLst>
-              <a:gd name="adj" fmla="val 181992"/>
-            </a:avLst>
-          </a:prstGeom>
-          <a:solidFill>
-            <a:srgbClr val="FBBF24">
-              <a:alpha val="80000"/>
-            </a:srgbClr>
-          </a:solidFill>
-          <a:ln w="12700">
-            <a:solidFill>
-              <a:srgbClr val="333333"/>
-            </a:solidFill>
-            <a:prstDash val="solid"/>
-          </a:ln>
-        </p:spPr>
-      </p:sp>
-      <p:sp>
-        <p:nvSpPr>
-          <p:cNvPr id="31" name="Text 29"/>
+          <p:cNvPr id="26" name="Text 24"/>
           <p:cNvSpPr/>
           <p:nvPr/>
         </p:nvSpPr>
@@ -7982,7 +7213,7 @@
       </p:sp>
       <p:sp>
         <p:nvSpPr>
-          <p:cNvPr id="32" name="Text 30"/>
+          <p:cNvPr id="27" name="Text 25"/>
           <p:cNvSpPr/>
           <p:nvPr/>
         </p:nvSpPr>
@@ -8002,9 +7233,6 @@
           <a:lstStyle/>
           <a:p>
             <a:pPr indent="0" marL="0">
-              <a:lnSpc>
-                <a:spcPct val="115000"/>
-              </a:lnSpc>
               <a:buNone/>
             </a:pPr>
             <a:r>
@@ -8024,7 +7252,7 @@
       </p:sp>
       <p:sp>
         <p:nvSpPr>
-          <p:cNvPr id="33" name="Shape 31"/>
+          <p:cNvPr id="28" name="Shape 26"/>
           <p:cNvSpPr/>
           <p:nvPr/>
         </p:nvSpPr>
@@ -8053,7 +7281,7 @@
       </p:sp>
       <p:sp>
         <p:nvSpPr>
-          <p:cNvPr id="34" name="Shape 32"/>
+          <p:cNvPr id="29" name="Shape 27"/>
           <p:cNvSpPr/>
           <p:nvPr/>
         </p:nvSpPr>
@@ -8075,7 +7303,7 @@
       </p:sp>
       <p:sp>
         <p:nvSpPr>
-          <p:cNvPr id="35" name="Shape 33"/>
+          <p:cNvPr id="30" name="Shape 28"/>
           <p:cNvSpPr/>
           <p:nvPr/>
         </p:nvSpPr>
@@ -8109,36 +7337,7 @@
       </p:sp>
       <p:sp>
         <p:nvSpPr>
-          <p:cNvPr id="36" name="Shape 34"/>
-          <p:cNvSpPr/>
-          <p:nvPr/>
-        </p:nvSpPr>
-        <p:spPr>
-          <a:xfrm>
-            <a:off x="796625" y="3366089"/>
-            <a:ext cx="190927" cy="190927"/>
-          </a:xfrm>
-          <a:prstGeom prst="roundRect">
-            <a:avLst>
-              <a:gd name="adj" fmla="val 181992"/>
-            </a:avLst>
-          </a:prstGeom>
-          <a:solidFill>
-            <a:srgbClr val="FBBF24">
-              <a:alpha val="80000"/>
-            </a:srgbClr>
-          </a:solidFill>
-          <a:ln w="12700">
-            <a:solidFill>
-              <a:srgbClr val="333333"/>
-            </a:solidFill>
-            <a:prstDash val="solid"/>
-          </a:ln>
-        </p:spPr>
-      </p:sp>
-      <p:sp>
-        <p:nvSpPr>
-          <p:cNvPr id="37" name="Text 35"/>
+          <p:cNvPr id="31" name="Text 29"/>
           <p:cNvSpPr/>
           <p:nvPr/>
         </p:nvSpPr>
@@ -8177,7 +7376,7 @@
       </p:sp>
       <p:sp>
         <p:nvSpPr>
-          <p:cNvPr id="38" name="Text 36"/>
+          <p:cNvPr id="32" name="Text 30"/>
           <p:cNvSpPr/>
           <p:nvPr/>
         </p:nvSpPr>
@@ -8197,9 +7396,6 @@
           <a:lstStyle/>
           <a:p>
             <a:pPr indent="0" marL="0">
-              <a:lnSpc>
-                <a:spcPct val="115000"/>
-              </a:lnSpc>
               <a:buNone/>
             </a:pPr>
             <a:r>
@@ -8219,7 +7415,7 @@
       </p:sp>
       <p:sp>
         <p:nvSpPr>
-          <p:cNvPr id="39" name="Shape 37"/>
+          <p:cNvPr id="33" name="Shape 31"/>
           <p:cNvSpPr/>
           <p:nvPr/>
         </p:nvSpPr>
@@ -8248,7 +7444,7 @@
       </p:sp>
       <p:sp>
         <p:nvSpPr>
-          <p:cNvPr id="40" name="Shape 38"/>
+          <p:cNvPr id="34" name="Shape 32"/>
           <p:cNvSpPr/>
           <p:nvPr/>
         </p:nvSpPr>
@@ -8270,7 +7466,7 @@
       </p:sp>
       <p:sp>
         <p:nvSpPr>
-          <p:cNvPr id="41" name="Shape 39"/>
+          <p:cNvPr id="35" name="Shape 33"/>
           <p:cNvSpPr/>
           <p:nvPr/>
         </p:nvSpPr>
@@ -8304,36 +7500,7 @@
       </p:sp>
       <p:sp>
         <p:nvSpPr>
-          <p:cNvPr id="42" name="Shape 40"/>
-          <p:cNvSpPr/>
-          <p:nvPr/>
-        </p:nvSpPr>
-        <p:spPr>
-          <a:xfrm>
-            <a:off x="796625" y="3987881"/>
-            <a:ext cx="190927" cy="190927"/>
-          </a:xfrm>
-          <a:prstGeom prst="roundRect">
-            <a:avLst>
-              <a:gd name="adj" fmla="val 181992"/>
-            </a:avLst>
-          </a:prstGeom>
-          <a:solidFill>
-            <a:srgbClr val="FBBF24">
-              <a:alpha val="80000"/>
-            </a:srgbClr>
-          </a:solidFill>
-          <a:ln w="12700">
-            <a:solidFill>
-              <a:srgbClr val="333333"/>
-            </a:solidFill>
-            <a:prstDash val="solid"/>
-          </a:ln>
-        </p:spPr>
-      </p:sp>
-      <p:sp>
-        <p:nvSpPr>
-          <p:cNvPr id="43" name="Text 41"/>
+          <p:cNvPr id="36" name="Text 34"/>
           <p:cNvSpPr/>
           <p:nvPr/>
         </p:nvSpPr>
@@ -8372,7 +7539,7 @@
       </p:sp>
       <p:sp>
         <p:nvSpPr>
-          <p:cNvPr id="44" name="Text 42"/>
+          <p:cNvPr id="37" name="Text 35"/>
           <p:cNvSpPr/>
           <p:nvPr/>
         </p:nvSpPr>
@@ -8392,9 +7559,6 @@
           <a:lstStyle/>
           <a:p>
             <a:pPr indent="0" marL="0">
-              <a:lnSpc>
-                <a:spcPct val="115000"/>
-              </a:lnSpc>
               <a:buNone/>
             </a:pPr>
             <a:r>
@@ -8414,7 +7578,7 @@
       </p:sp>
       <p:sp>
         <p:nvSpPr>
-          <p:cNvPr id="45" name="Shape 43"/>
+          <p:cNvPr id="38" name="Shape 36"/>
           <p:cNvSpPr/>
           <p:nvPr/>
         </p:nvSpPr>
@@ -8434,7 +7598,7 @@
       </p:sp>
       <p:sp>
         <p:nvSpPr>
-          <p:cNvPr id="46" name="Shape 44"/>
+          <p:cNvPr id="39" name="Shape 37"/>
           <p:cNvSpPr/>
           <p:nvPr/>
         </p:nvSpPr>
@@ -8456,7 +7620,7 @@
       </p:sp>
       <p:sp>
         <p:nvSpPr>
-          <p:cNvPr id="47" name="Shape 45"/>
+          <p:cNvPr id="40" name="Shape 38"/>
           <p:cNvSpPr/>
           <p:nvPr/>
         </p:nvSpPr>
@@ -8487,7 +7651,7 @@
       </p:sp>
       <p:sp>
         <p:nvSpPr>
-          <p:cNvPr id="48" name="Text 46"/>
+          <p:cNvPr id="41" name="Text 39"/>
           <p:cNvSpPr/>
           <p:nvPr/>
         </p:nvSpPr>
@@ -8638,55 +7802,6 @@
         </p:nvSpPr>
         <p:spPr>
           <a:xfrm>
-            <a:off x="7909560" y="201168"/>
-            <a:ext cx="685800" cy="685800"/>
-          </a:xfrm>
-          <a:prstGeom prst="ellipse">
-            <a:avLst/>
-          </a:prstGeom>
-          <a:solidFill>
-            <a:srgbClr val="ECFDF5">
-              <a:alpha val="0"/>
-            </a:srgbClr>
-          </a:solidFill>
-          <a:ln w="15875">
-            <a:solidFill>
-              <a:srgbClr val="FBBF24"/>
-            </a:solidFill>
-            <a:prstDash val="solid"/>
-          </a:ln>
-        </p:spPr>
-      </p:sp>
-      <p:sp>
-        <p:nvSpPr>
-          <p:cNvPr id="6" name="Shape 4"/>
-          <p:cNvSpPr/>
-          <p:nvPr/>
-        </p:nvSpPr>
-        <p:spPr>
-          <a:xfrm>
-            <a:off x="8183880" y="384048"/>
-            <a:ext cx="384048" cy="384048"/>
-          </a:xfrm>
-          <a:prstGeom prst="ellipse">
-            <a:avLst/>
-          </a:prstGeom>
-          <a:solidFill>
-            <a:srgbClr val="FBBF24">
-              <a:alpha val="35000"/>
-            </a:srgbClr>
-          </a:solidFill>
-          <a:ln/>
-        </p:spPr>
-      </p:sp>
-      <p:sp>
-        <p:nvSpPr>
-          <p:cNvPr id="7" name="Shape 5"/>
-          <p:cNvSpPr/>
-          <p:nvPr/>
-        </p:nvSpPr>
-        <p:spPr>
-          <a:xfrm>
             <a:off x="109728" y="0"/>
             <a:ext cx="9034272" cy="960120"/>
           </a:xfrm>
@@ -8701,7 +7816,7 @@
       </p:sp>
       <p:sp>
         <p:nvSpPr>
-          <p:cNvPr id="8" name="Shape 6"/>
+          <p:cNvPr id="6" name="Shape 4"/>
           <p:cNvSpPr/>
           <p:nvPr/>
         </p:nvSpPr>
@@ -8723,7 +7838,7 @@
       </p:sp>
       <p:sp>
         <p:nvSpPr>
-          <p:cNvPr id="9" name="Shape 7"/>
+          <p:cNvPr id="7" name="Shape 5"/>
           <p:cNvSpPr/>
           <p:nvPr/>
         </p:nvSpPr>
@@ -8745,7 +7860,7 @@
       </p:sp>
       <p:sp>
         <p:nvSpPr>
-          <p:cNvPr id="10" name="Shape 8"/>
+          <p:cNvPr id="8" name="Shape 6"/>
           <p:cNvSpPr/>
           <p:nvPr/>
         </p:nvSpPr>
@@ -8765,7 +7880,7 @@
       </p:sp>
       <p:sp>
         <p:nvSpPr>
-          <p:cNvPr id="11" name="Shape 9"/>
+          <p:cNvPr id="9" name="Shape 7"/>
           <p:cNvSpPr/>
           <p:nvPr/>
         </p:nvSpPr>
@@ -8796,7 +7911,7 @@
       </p:sp>
       <p:sp>
         <p:nvSpPr>
-          <p:cNvPr id="12" name="Text 10"/>
+          <p:cNvPr id="10" name="Text 8"/>
           <p:cNvSpPr/>
           <p:nvPr/>
         </p:nvSpPr>
@@ -8837,7 +7952,7 @@
       </p:sp>
       <p:sp>
         <p:nvSpPr>
-          <p:cNvPr id="13" name="Text 11"/>
+          <p:cNvPr id="11" name="Text 9"/>
           <p:cNvSpPr/>
           <p:nvPr/>
         </p:nvSpPr>
@@ -8876,7 +7991,7 @@
       </p:sp>
       <p:sp>
         <p:nvSpPr>
-          <p:cNvPr id="14" name="Shape 12"/>
+          <p:cNvPr id="12" name="Shape 10"/>
           <p:cNvSpPr/>
           <p:nvPr/>
         </p:nvSpPr>
@@ -8910,7 +8025,7 @@
       </p:sp>
       <p:sp>
         <p:nvSpPr>
-          <p:cNvPr id="15" name="Shape 13"/>
+          <p:cNvPr id="13" name="Shape 11"/>
           <p:cNvSpPr/>
           <p:nvPr/>
         </p:nvSpPr>
@@ -8939,7 +8054,7 @@
       </p:sp>
       <p:sp>
         <p:nvSpPr>
-          <p:cNvPr id="16" name="Shape 14"/>
+          <p:cNvPr id="14" name="Shape 12"/>
           <p:cNvSpPr/>
           <p:nvPr/>
         </p:nvSpPr>
@@ -8961,7 +8076,7 @@
       </p:sp>
       <p:sp>
         <p:nvSpPr>
-          <p:cNvPr id="17" name="Shape 15"/>
+          <p:cNvPr id="15" name="Shape 13"/>
           <p:cNvSpPr/>
           <p:nvPr/>
         </p:nvSpPr>
@@ -8995,36 +8110,7 @@
       </p:sp>
       <p:sp>
         <p:nvSpPr>
-          <p:cNvPr id="18" name="Shape 16"/>
-          <p:cNvSpPr/>
-          <p:nvPr/>
-        </p:nvSpPr>
-        <p:spPr>
-          <a:xfrm>
-            <a:off x="796625" y="1500713"/>
-            <a:ext cx="190927" cy="190927"/>
-          </a:xfrm>
-          <a:prstGeom prst="roundRect">
-            <a:avLst>
-              <a:gd name="adj" fmla="val 181992"/>
-            </a:avLst>
-          </a:prstGeom>
-          <a:solidFill>
-            <a:srgbClr val="FBBF24">
-              <a:alpha val="80000"/>
-            </a:srgbClr>
-          </a:solidFill>
-          <a:ln w="12700">
-            <a:solidFill>
-              <a:srgbClr val="333333"/>
-            </a:solidFill>
-            <a:prstDash val="solid"/>
-          </a:ln>
-        </p:spPr>
-      </p:sp>
-      <p:sp>
-        <p:nvSpPr>
-          <p:cNvPr id="19" name="Text 17"/>
+          <p:cNvPr id="16" name="Text 14"/>
           <p:cNvSpPr/>
           <p:nvPr/>
         </p:nvSpPr>
@@ -9063,7 +8149,7 @@
       </p:sp>
       <p:sp>
         <p:nvSpPr>
-          <p:cNvPr id="20" name="Text 18"/>
+          <p:cNvPr id="17" name="Text 15"/>
           <p:cNvSpPr/>
           <p:nvPr/>
         </p:nvSpPr>
@@ -9083,9 +8169,6 @@
           <a:lstStyle/>
           <a:p>
             <a:pPr indent="0" marL="0">
-              <a:lnSpc>
-                <a:spcPct val="115000"/>
-              </a:lnSpc>
               <a:buNone/>
             </a:pPr>
             <a:r>
@@ -9105,7 +8188,7 @@
       </p:sp>
       <p:sp>
         <p:nvSpPr>
-          <p:cNvPr id="21" name="Shape 19"/>
+          <p:cNvPr id="18" name="Shape 16"/>
           <p:cNvSpPr/>
           <p:nvPr/>
         </p:nvSpPr>
@@ -9134,7 +8217,7 @@
       </p:sp>
       <p:sp>
         <p:nvSpPr>
-          <p:cNvPr id="22" name="Shape 20"/>
+          <p:cNvPr id="19" name="Shape 17"/>
           <p:cNvSpPr/>
           <p:nvPr/>
         </p:nvSpPr>
@@ -9156,7 +8239,7 @@
       </p:sp>
       <p:sp>
         <p:nvSpPr>
-          <p:cNvPr id="23" name="Shape 21"/>
+          <p:cNvPr id="20" name="Shape 18"/>
           <p:cNvSpPr/>
           <p:nvPr/>
         </p:nvSpPr>
@@ -9190,36 +8273,7 @@
       </p:sp>
       <p:sp>
         <p:nvSpPr>
-          <p:cNvPr id="24" name="Shape 22"/>
-          <p:cNvSpPr/>
-          <p:nvPr/>
-        </p:nvSpPr>
-        <p:spPr>
-          <a:xfrm>
-            <a:off x="796625" y="2122505"/>
-            <a:ext cx="190927" cy="190927"/>
-          </a:xfrm>
-          <a:prstGeom prst="roundRect">
-            <a:avLst>
-              <a:gd name="adj" fmla="val 181992"/>
-            </a:avLst>
-          </a:prstGeom>
-          <a:solidFill>
-            <a:srgbClr val="FBBF24">
-              <a:alpha val="80000"/>
-            </a:srgbClr>
-          </a:solidFill>
-          <a:ln w="12700">
-            <a:solidFill>
-              <a:srgbClr val="333333"/>
-            </a:solidFill>
-            <a:prstDash val="solid"/>
-          </a:ln>
-        </p:spPr>
-      </p:sp>
-      <p:sp>
-        <p:nvSpPr>
-          <p:cNvPr id="25" name="Text 23"/>
+          <p:cNvPr id="21" name="Text 19"/>
           <p:cNvSpPr/>
           <p:nvPr/>
         </p:nvSpPr>
@@ -9258,7 +8312,7 @@
       </p:sp>
       <p:sp>
         <p:nvSpPr>
-          <p:cNvPr id="26" name="Text 24"/>
+          <p:cNvPr id="22" name="Text 20"/>
           <p:cNvSpPr/>
           <p:nvPr/>
         </p:nvSpPr>
@@ -9278,9 +8332,6 @@
           <a:lstStyle/>
           <a:p>
             <a:pPr indent="0" marL="0">
-              <a:lnSpc>
-                <a:spcPct val="115000"/>
-              </a:lnSpc>
               <a:buNone/>
             </a:pPr>
             <a:r>
@@ -9300,7 +8351,7 @@
       </p:sp>
       <p:sp>
         <p:nvSpPr>
-          <p:cNvPr id="27" name="Shape 25"/>
+          <p:cNvPr id="23" name="Shape 21"/>
           <p:cNvSpPr/>
           <p:nvPr/>
         </p:nvSpPr>
@@ -9329,7 +8380,7 @@
       </p:sp>
       <p:sp>
         <p:nvSpPr>
-          <p:cNvPr id="28" name="Shape 26"/>
+          <p:cNvPr id="24" name="Shape 22"/>
           <p:cNvSpPr/>
           <p:nvPr/>
         </p:nvSpPr>
@@ -9351,7 +8402,7 @@
       </p:sp>
       <p:sp>
         <p:nvSpPr>
-          <p:cNvPr id="29" name="Shape 27"/>
+          <p:cNvPr id="25" name="Shape 23"/>
           <p:cNvSpPr/>
           <p:nvPr/>
         </p:nvSpPr>
@@ -9385,36 +8436,7 @@
       </p:sp>
       <p:sp>
         <p:nvSpPr>
-          <p:cNvPr id="30" name="Shape 28"/>
-          <p:cNvSpPr/>
-          <p:nvPr/>
-        </p:nvSpPr>
-        <p:spPr>
-          <a:xfrm>
-            <a:off x="796625" y="2744297"/>
-            <a:ext cx="190927" cy="190927"/>
-          </a:xfrm>
-          <a:prstGeom prst="roundRect">
-            <a:avLst>
-              <a:gd name="adj" fmla="val 181992"/>
-            </a:avLst>
-          </a:prstGeom>
-          <a:solidFill>
-            <a:srgbClr val="FBBF24">
-              <a:alpha val="80000"/>
-            </a:srgbClr>
-          </a:solidFill>
-          <a:ln w="12700">
-            <a:solidFill>
-              <a:srgbClr val="333333"/>
-            </a:solidFill>
-            <a:prstDash val="solid"/>
-          </a:ln>
-        </p:spPr>
-      </p:sp>
-      <p:sp>
-        <p:nvSpPr>
-          <p:cNvPr id="31" name="Text 29"/>
+          <p:cNvPr id="26" name="Text 24"/>
           <p:cNvSpPr/>
           <p:nvPr/>
         </p:nvSpPr>
@@ -9453,7 +8475,7 @@
       </p:sp>
       <p:sp>
         <p:nvSpPr>
-          <p:cNvPr id="32" name="Text 30"/>
+          <p:cNvPr id="27" name="Text 25"/>
           <p:cNvSpPr/>
           <p:nvPr/>
         </p:nvSpPr>
@@ -9473,9 +8495,6 @@
           <a:lstStyle/>
           <a:p>
             <a:pPr indent="0" marL="0">
-              <a:lnSpc>
-                <a:spcPct val="115000"/>
-              </a:lnSpc>
               <a:buNone/>
             </a:pPr>
             <a:r>
@@ -9495,7 +8514,7 @@
       </p:sp>
       <p:sp>
         <p:nvSpPr>
-          <p:cNvPr id="33" name="Shape 31"/>
+          <p:cNvPr id="28" name="Shape 26"/>
           <p:cNvSpPr/>
           <p:nvPr/>
         </p:nvSpPr>
@@ -9524,7 +8543,7 @@
       </p:sp>
       <p:sp>
         <p:nvSpPr>
-          <p:cNvPr id="34" name="Shape 32"/>
+          <p:cNvPr id="29" name="Shape 27"/>
           <p:cNvSpPr/>
           <p:nvPr/>
         </p:nvSpPr>
@@ -9546,7 +8565,7 @@
       </p:sp>
       <p:sp>
         <p:nvSpPr>
-          <p:cNvPr id="35" name="Shape 33"/>
+          <p:cNvPr id="30" name="Shape 28"/>
           <p:cNvSpPr/>
           <p:nvPr/>
         </p:nvSpPr>
@@ -9580,36 +8599,7 @@
       </p:sp>
       <p:sp>
         <p:nvSpPr>
-          <p:cNvPr id="36" name="Shape 34"/>
-          <p:cNvSpPr/>
-          <p:nvPr/>
-        </p:nvSpPr>
-        <p:spPr>
-          <a:xfrm>
-            <a:off x="796625" y="3366089"/>
-            <a:ext cx="190927" cy="190927"/>
-          </a:xfrm>
-          <a:prstGeom prst="roundRect">
-            <a:avLst>
-              <a:gd name="adj" fmla="val 181992"/>
-            </a:avLst>
-          </a:prstGeom>
-          <a:solidFill>
-            <a:srgbClr val="FBBF24">
-              <a:alpha val="80000"/>
-            </a:srgbClr>
-          </a:solidFill>
-          <a:ln w="12700">
-            <a:solidFill>
-              <a:srgbClr val="333333"/>
-            </a:solidFill>
-            <a:prstDash val="solid"/>
-          </a:ln>
-        </p:spPr>
-      </p:sp>
-      <p:sp>
-        <p:nvSpPr>
-          <p:cNvPr id="37" name="Text 35"/>
+          <p:cNvPr id="31" name="Text 29"/>
           <p:cNvSpPr/>
           <p:nvPr/>
         </p:nvSpPr>
@@ -9648,7 +8638,7 @@
       </p:sp>
       <p:sp>
         <p:nvSpPr>
-          <p:cNvPr id="38" name="Text 36"/>
+          <p:cNvPr id="32" name="Text 30"/>
           <p:cNvSpPr/>
           <p:nvPr/>
         </p:nvSpPr>
@@ -9668,9 +8658,6 @@
           <a:lstStyle/>
           <a:p>
             <a:pPr indent="0" marL="0">
-              <a:lnSpc>
-                <a:spcPct val="115000"/>
-              </a:lnSpc>
               <a:buNone/>
             </a:pPr>
             <a:r>
@@ -9690,7 +8677,7 @@
       </p:sp>
       <p:sp>
         <p:nvSpPr>
-          <p:cNvPr id="39" name="Shape 37"/>
+          <p:cNvPr id="33" name="Shape 31"/>
           <p:cNvSpPr/>
           <p:nvPr/>
         </p:nvSpPr>
@@ -9719,7 +8706,7 @@
       </p:sp>
       <p:sp>
         <p:nvSpPr>
-          <p:cNvPr id="40" name="Shape 38"/>
+          <p:cNvPr id="34" name="Shape 32"/>
           <p:cNvSpPr/>
           <p:nvPr/>
         </p:nvSpPr>
@@ -9741,7 +8728,7 @@
       </p:sp>
       <p:sp>
         <p:nvSpPr>
-          <p:cNvPr id="41" name="Shape 39"/>
+          <p:cNvPr id="35" name="Shape 33"/>
           <p:cNvSpPr/>
           <p:nvPr/>
         </p:nvSpPr>
@@ -9775,36 +8762,7 @@
       </p:sp>
       <p:sp>
         <p:nvSpPr>
-          <p:cNvPr id="42" name="Shape 40"/>
-          <p:cNvSpPr/>
-          <p:nvPr/>
-        </p:nvSpPr>
-        <p:spPr>
-          <a:xfrm>
-            <a:off x="796625" y="3987881"/>
-            <a:ext cx="190927" cy="190927"/>
-          </a:xfrm>
-          <a:prstGeom prst="roundRect">
-            <a:avLst>
-              <a:gd name="adj" fmla="val 181992"/>
-            </a:avLst>
-          </a:prstGeom>
-          <a:solidFill>
-            <a:srgbClr val="FBBF24">
-              <a:alpha val="80000"/>
-            </a:srgbClr>
-          </a:solidFill>
-          <a:ln w="12700">
-            <a:solidFill>
-              <a:srgbClr val="333333"/>
-            </a:solidFill>
-            <a:prstDash val="solid"/>
-          </a:ln>
-        </p:spPr>
-      </p:sp>
-      <p:sp>
-        <p:nvSpPr>
-          <p:cNvPr id="43" name="Text 41"/>
+          <p:cNvPr id="36" name="Text 34"/>
           <p:cNvSpPr/>
           <p:nvPr/>
         </p:nvSpPr>
@@ -9843,7 +8801,7 @@
       </p:sp>
       <p:sp>
         <p:nvSpPr>
-          <p:cNvPr id="44" name="Text 42"/>
+          <p:cNvPr id="37" name="Text 35"/>
           <p:cNvSpPr/>
           <p:nvPr/>
         </p:nvSpPr>
@@ -9863,9 +8821,6 @@
           <a:lstStyle/>
           <a:p>
             <a:pPr indent="0" marL="0">
-              <a:lnSpc>
-                <a:spcPct val="115000"/>
-              </a:lnSpc>
               <a:buNone/>
             </a:pPr>
             <a:r>
@@ -9885,7 +8840,7 @@
       </p:sp>
       <p:sp>
         <p:nvSpPr>
-          <p:cNvPr id="45" name="Shape 43"/>
+          <p:cNvPr id="38" name="Shape 36"/>
           <p:cNvSpPr/>
           <p:nvPr/>
         </p:nvSpPr>
@@ -9905,7 +8860,7 @@
       </p:sp>
       <p:sp>
         <p:nvSpPr>
-          <p:cNvPr id="46" name="Shape 44"/>
+          <p:cNvPr id="39" name="Shape 37"/>
           <p:cNvSpPr/>
           <p:nvPr/>
         </p:nvSpPr>
@@ -9927,7 +8882,7 @@
       </p:sp>
       <p:sp>
         <p:nvSpPr>
-          <p:cNvPr id="47" name="Shape 45"/>
+          <p:cNvPr id="40" name="Shape 38"/>
           <p:cNvSpPr/>
           <p:nvPr/>
         </p:nvSpPr>
@@ -9958,7 +8913,7 @@
       </p:sp>
       <p:sp>
         <p:nvSpPr>
-          <p:cNvPr id="48" name="Text 46"/>
+          <p:cNvPr id="41" name="Text 39"/>
           <p:cNvSpPr/>
           <p:nvPr/>
         </p:nvSpPr>
@@ -10109,55 +9064,6 @@
         </p:nvSpPr>
         <p:spPr>
           <a:xfrm>
-            <a:off x="7909560" y="201168"/>
-            <a:ext cx="685800" cy="685800"/>
-          </a:xfrm>
-          <a:prstGeom prst="ellipse">
-            <a:avLst/>
-          </a:prstGeom>
-          <a:solidFill>
-            <a:srgbClr val="ECFDF5">
-              <a:alpha val="0"/>
-            </a:srgbClr>
-          </a:solidFill>
-          <a:ln w="15875">
-            <a:solidFill>
-              <a:srgbClr val="FBBF24"/>
-            </a:solidFill>
-            <a:prstDash val="solid"/>
-          </a:ln>
-        </p:spPr>
-      </p:sp>
-      <p:sp>
-        <p:nvSpPr>
-          <p:cNvPr id="6" name="Shape 4"/>
-          <p:cNvSpPr/>
-          <p:nvPr/>
-        </p:nvSpPr>
-        <p:spPr>
-          <a:xfrm>
-            <a:off x="8183880" y="384048"/>
-            <a:ext cx="384048" cy="384048"/>
-          </a:xfrm>
-          <a:prstGeom prst="ellipse">
-            <a:avLst/>
-          </a:prstGeom>
-          <a:solidFill>
-            <a:srgbClr val="FBBF24">
-              <a:alpha val="35000"/>
-            </a:srgbClr>
-          </a:solidFill>
-          <a:ln/>
-        </p:spPr>
-      </p:sp>
-      <p:sp>
-        <p:nvSpPr>
-          <p:cNvPr id="7" name="Shape 5"/>
-          <p:cNvSpPr/>
-          <p:nvPr/>
-        </p:nvSpPr>
-        <p:spPr>
-          <a:xfrm>
             <a:off x="109728" y="0"/>
             <a:ext cx="9034272" cy="960120"/>
           </a:xfrm>
@@ -10172,7 +9078,7 @@
       </p:sp>
       <p:sp>
         <p:nvSpPr>
-          <p:cNvPr id="8" name="Shape 6"/>
+          <p:cNvPr id="6" name="Shape 4"/>
           <p:cNvSpPr/>
           <p:nvPr/>
         </p:nvSpPr>
@@ -10194,7 +9100,7 @@
       </p:sp>
       <p:sp>
         <p:nvSpPr>
-          <p:cNvPr id="9" name="Shape 7"/>
+          <p:cNvPr id="7" name="Shape 5"/>
           <p:cNvSpPr/>
           <p:nvPr/>
         </p:nvSpPr>
@@ -10216,7 +9122,7 @@
       </p:sp>
       <p:sp>
         <p:nvSpPr>
-          <p:cNvPr id="10" name="Shape 8"/>
+          <p:cNvPr id="8" name="Shape 6"/>
           <p:cNvSpPr/>
           <p:nvPr/>
         </p:nvSpPr>
@@ -10236,7 +9142,7 @@
       </p:sp>
       <p:sp>
         <p:nvSpPr>
-          <p:cNvPr id="11" name="Shape 9"/>
+          <p:cNvPr id="9" name="Shape 7"/>
           <p:cNvSpPr/>
           <p:nvPr/>
         </p:nvSpPr>
@@ -10267,7 +9173,7 @@
       </p:sp>
       <p:sp>
         <p:nvSpPr>
-          <p:cNvPr id="12" name="Text 10"/>
+          <p:cNvPr id="10" name="Text 8"/>
           <p:cNvSpPr/>
           <p:nvPr/>
         </p:nvSpPr>
@@ -10308,7 +9214,7 @@
       </p:sp>
       <p:sp>
         <p:nvSpPr>
-          <p:cNvPr id="13" name="Text 11"/>
+          <p:cNvPr id="11" name="Text 9"/>
           <p:cNvSpPr/>
           <p:nvPr/>
         </p:nvSpPr>
@@ -10347,7 +9253,7 @@
       </p:sp>
       <p:sp>
         <p:nvSpPr>
-          <p:cNvPr id="14" name="Shape 12"/>
+          <p:cNvPr id="12" name="Shape 10"/>
           <p:cNvSpPr/>
           <p:nvPr/>
         </p:nvSpPr>
@@ -10381,7 +9287,7 @@
       </p:sp>
       <p:sp>
         <p:nvSpPr>
-          <p:cNvPr id="15" name="Shape 13"/>
+          <p:cNvPr id="13" name="Shape 11"/>
           <p:cNvSpPr/>
           <p:nvPr/>
         </p:nvSpPr>
@@ -10410,7 +9316,7 @@
       </p:sp>
       <p:sp>
         <p:nvSpPr>
-          <p:cNvPr id="16" name="Shape 14"/>
+          <p:cNvPr id="14" name="Shape 12"/>
           <p:cNvSpPr/>
           <p:nvPr/>
         </p:nvSpPr>
@@ -10432,7 +9338,7 @@
       </p:sp>
       <p:sp>
         <p:nvSpPr>
-          <p:cNvPr id="17" name="Shape 15"/>
+          <p:cNvPr id="15" name="Shape 13"/>
           <p:cNvSpPr/>
           <p:nvPr/>
         </p:nvSpPr>
@@ -10466,36 +9372,7 @@
       </p:sp>
       <p:sp>
         <p:nvSpPr>
-          <p:cNvPr id="18" name="Shape 16"/>
-          <p:cNvSpPr/>
-          <p:nvPr/>
-        </p:nvSpPr>
-        <p:spPr>
-          <a:xfrm>
-            <a:off x="796625" y="1500713"/>
-            <a:ext cx="190927" cy="190927"/>
-          </a:xfrm>
-          <a:prstGeom prst="roundRect">
-            <a:avLst>
-              <a:gd name="adj" fmla="val 181992"/>
-            </a:avLst>
-          </a:prstGeom>
-          <a:solidFill>
-            <a:srgbClr val="FBBF24">
-              <a:alpha val="80000"/>
-            </a:srgbClr>
-          </a:solidFill>
-          <a:ln w="12700">
-            <a:solidFill>
-              <a:srgbClr val="333333"/>
-            </a:solidFill>
-            <a:prstDash val="solid"/>
-          </a:ln>
-        </p:spPr>
-      </p:sp>
-      <p:sp>
-        <p:nvSpPr>
-          <p:cNvPr id="19" name="Text 17"/>
+          <p:cNvPr id="16" name="Text 14"/>
           <p:cNvSpPr/>
           <p:nvPr/>
         </p:nvSpPr>
@@ -10534,7 +9411,7 @@
       </p:sp>
       <p:sp>
         <p:nvSpPr>
-          <p:cNvPr id="20" name="Text 18"/>
+          <p:cNvPr id="17" name="Text 15"/>
           <p:cNvSpPr/>
           <p:nvPr/>
         </p:nvSpPr>
@@ -10554,9 +9431,6 @@
           <a:lstStyle/>
           <a:p>
             <a:pPr indent="0" marL="0">
-              <a:lnSpc>
-                <a:spcPct val="115000"/>
-              </a:lnSpc>
               <a:buNone/>
             </a:pPr>
             <a:r>
@@ -10576,7 +9450,7 @@
       </p:sp>
       <p:sp>
         <p:nvSpPr>
-          <p:cNvPr id="21" name="Shape 19"/>
+          <p:cNvPr id="18" name="Shape 16"/>
           <p:cNvSpPr/>
           <p:nvPr/>
         </p:nvSpPr>
@@ -10605,7 +9479,7 @@
       </p:sp>
       <p:sp>
         <p:nvSpPr>
-          <p:cNvPr id="22" name="Shape 20"/>
+          <p:cNvPr id="19" name="Shape 17"/>
           <p:cNvSpPr/>
           <p:nvPr/>
         </p:nvSpPr>
@@ -10627,7 +9501,7 @@
       </p:sp>
       <p:sp>
         <p:nvSpPr>
-          <p:cNvPr id="23" name="Shape 21"/>
+          <p:cNvPr id="20" name="Shape 18"/>
           <p:cNvSpPr/>
           <p:nvPr/>
         </p:nvSpPr>
@@ -10661,36 +9535,7 @@
       </p:sp>
       <p:sp>
         <p:nvSpPr>
-          <p:cNvPr id="24" name="Shape 22"/>
-          <p:cNvSpPr/>
-          <p:nvPr/>
-        </p:nvSpPr>
-        <p:spPr>
-          <a:xfrm>
-            <a:off x="796625" y="2122505"/>
-            <a:ext cx="190927" cy="190927"/>
-          </a:xfrm>
-          <a:prstGeom prst="roundRect">
-            <a:avLst>
-              <a:gd name="adj" fmla="val 181992"/>
-            </a:avLst>
-          </a:prstGeom>
-          <a:solidFill>
-            <a:srgbClr val="FBBF24">
-              <a:alpha val="80000"/>
-            </a:srgbClr>
-          </a:solidFill>
-          <a:ln w="12700">
-            <a:solidFill>
-              <a:srgbClr val="333333"/>
-            </a:solidFill>
-            <a:prstDash val="solid"/>
-          </a:ln>
-        </p:spPr>
-      </p:sp>
-      <p:sp>
-        <p:nvSpPr>
-          <p:cNvPr id="25" name="Text 23"/>
+          <p:cNvPr id="21" name="Text 19"/>
           <p:cNvSpPr/>
           <p:nvPr/>
         </p:nvSpPr>
@@ -10729,7 +9574,7 @@
       </p:sp>
       <p:sp>
         <p:nvSpPr>
-          <p:cNvPr id="26" name="Text 24"/>
+          <p:cNvPr id="22" name="Text 20"/>
           <p:cNvSpPr/>
           <p:nvPr/>
         </p:nvSpPr>
@@ -10749,9 +9594,6 @@
           <a:lstStyle/>
           <a:p>
             <a:pPr indent="0" marL="0">
-              <a:lnSpc>
-                <a:spcPct val="115000"/>
-              </a:lnSpc>
               <a:buNone/>
             </a:pPr>
             <a:r>
@@ -10771,7 +9613,7 @@
       </p:sp>
       <p:sp>
         <p:nvSpPr>
-          <p:cNvPr id="27" name="Shape 25"/>
+          <p:cNvPr id="23" name="Shape 21"/>
           <p:cNvSpPr/>
           <p:nvPr/>
         </p:nvSpPr>
@@ -10800,7 +9642,7 @@
       </p:sp>
       <p:sp>
         <p:nvSpPr>
-          <p:cNvPr id="28" name="Shape 26"/>
+          <p:cNvPr id="24" name="Shape 22"/>
           <p:cNvSpPr/>
           <p:nvPr/>
         </p:nvSpPr>
@@ -10822,7 +9664,7 @@
       </p:sp>
       <p:sp>
         <p:nvSpPr>
-          <p:cNvPr id="29" name="Shape 27"/>
+          <p:cNvPr id="25" name="Shape 23"/>
           <p:cNvSpPr/>
           <p:nvPr/>
         </p:nvSpPr>
@@ -10856,36 +9698,7 @@
       </p:sp>
       <p:sp>
         <p:nvSpPr>
-          <p:cNvPr id="30" name="Shape 28"/>
-          <p:cNvSpPr/>
-          <p:nvPr/>
-        </p:nvSpPr>
-        <p:spPr>
-          <a:xfrm>
-            <a:off x="796625" y="2744297"/>
-            <a:ext cx="190927" cy="190927"/>
-          </a:xfrm>
-          <a:prstGeom prst="roundRect">
-            <a:avLst>
-              <a:gd name="adj" fmla="val 181992"/>
-            </a:avLst>
-          </a:prstGeom>
-          <a:solidFill>
-            <a:srgbClr val="FBBF24">
-              <a:alpha val="80000"/>
-            </a:srgbClr>
-          </a:solidFill>
-          <a:ln w="12700">
-            <a:solidFill>
-              <a:srgbClr val="333333"/>
-            </a:solidFill>
-            <a:prstDash val="solid"/>
-          </a:ln>
-        </p:spPr>
-      </p:sp>
-      <p:sp>
-        <p:nvSpPr>
-          <p:cNvPr id="31" name="Text 29"/>
+          <p:cNvPr id="26" name="Text 24"/>
           <p:cNvSpPr/>
           <p:nvPr/>
         </p:nvSpPr>
@@ -10924,7 +9737,7 @@
       </p:sp>
       <p:sp>
         <p:nvSpPr>
-          <p:cNvPr id="32" name="Text 30"/>
+          <p:cNvPr id="27" name="Text 25"/>
           <p:cNvSpPr/>
           <p:nvPr/>
         </p:nvSpPr>
@@ -10944,9 +9757,6 @@
           <a:lstStyle/>
           <a:p>
             <a:pPr indent="0" marL="0">
-              <a:lnSpc>
-                <a:spcPct val="115000"/>
-              </a:lnSpc>
               <a:buNone/>
             </a:pPr>
             <a:r>
@@ -10966,7 +9776,7 @@
       </p:sp>
       <p:sp>
         <p:nvSpPr>
-          <p:cNvPr id="33" name="Shape 31"/>
+          <p:cNvPr id="28" name="Shape 26"/>
           <p:cNvSpPr/>
           <p:nvPr/>
         </p:nvSpPr>
@@ -10995,7 +9805,7 @@
       </p:sp>
       <p:sp>
         <p:nvSpPr>
-          <p:cNvPr id="34" name="Shape 32"/>
+          <p:cNvPr id="29" name="Shape 27"/>
           <p:cNvSpPr/>
           <p:nvPr/>
         </p:nvSpPr>
@@ -11017,7 +9827,7 @@
       </p:sp>
       <p:sp>
         <p:nvSpPr>
-          <p:cNvPr id="35" name="Shape 33"/>
+          <p:cNvPr id="30" name="Shape 28"/>
           <p:cNvSpPr/>
           <p:nvPr/>
         </p:nvSpPr>
@@ -11051,36 +9861,7 @@
       </p:sp>
       <p:sp>
         <p:nvSpPr>
-          <p:cNvPr id="36" name="Shape 34"/>
-          <p:cNvSpPr/>
-          <p:nvPr/>
-        </p:nvSpPr>
-        <p:spPr>
-          <a:xfrm>
-            <a:off x="796625" y="3366089"/>
-            <a:ext cx="190927" cy="190927"/>
-          </a:xfrm>
-          <a:prstGeom prst="roundRect">
-            <a:avLst>
-              <a:gd name="adj" fmla="val 181992"/>
-            </a:avLst>
-          </a:prstGeom>
-          <a:solidFill>
-            <a:srgbClr val="FBBF24">
-              <a:alpha val="80000"/>
-            </a:srgbClr>
-          </a:solidFill>
-          <a:ln w="12700">
-            <a:solidFill>
-              <a:srgbClr val="333333"/>
-            </a:solidFill>
-            <a:prstDash val="solid"/>
-          </a:ln>
-        </p:spPr>
-      </p:sp>
-      <p:sp>
-        <p:nvSpPr>
-          <p:cNvPr id="37" name="Text 35"/>
+          <p:cNvPr id="31" name="Text 29"/>
           <p:cNvSpPr/>
           <p:nvPr/>
         </p:nvSpPr>
@@ -11119,7 +9900,7 @@
       </p:sp>
       <p:sp>
         <p:nvSpPr>
-          <p:cNvPr id="38" name="Text 36"/>
+          <p:cNvPr id="32" name="Text 30"/>
           <p:cNvSpPr/>
           <p:nvPr/>
         </p:nvSpPr>
@@ -11139,9 +9920,6 @@
           <a:lstStyle/>
           <a:p>
             <a:pPr indent="0" marL="0">
-              <a:lnSpc>
-                <a:spcPct val="115000"/>
-              </a:lnSpc>
               <a:buNone/>
             </a:pPr>
             <a:r>
@@ -11161,7 +9939,7 @@
       </p:sp>
       <p:sp>
         <p:nvSpPr>
-          <p:cNvPr id="39" name="Shape 37"/>
+          <p:cNvPr id="33" name="Shape 31"/>
           <p:cNvSpPr/>
           <p:nvPr/>
         </p:nvSpPr>
@@ -11190,7 +9968,7 @@
       </p:sp>
       <p:sp>
         <p:nvSpPr>
-          <p:cNvPr id="40" name="Shape 38"/>
+          <p:cNvPr id="34" name="Shape 32"/>
           <p:cNvSpPr/>
           <p:nvPr/>
         </p:nvSpPr>
@@ -11212,7 +9990,7 @@
       </p:sp>
       <p:sp>
         <p:nvSpPr>
-          <p:cNvPr id="41" name="Shape 39"/>
+          <p:cNvPr id="35" name="Shape 33"/>
           <p:cNvSpPr/>
           <p:nvPr/>
         </p:nvSpPr>
@@ -11246,36 +10024,7 @@
       </p:sp>
       <p:sp>
         <p:nvSpPr>
-          <p:cNvPr id="42" name="Shape 40"/>
-          <p:cNvSpPr/>
-          <p:nvPr/>
-        </p:nvSpPr>
-        <p:spPr>
-          <a:xfrm>
-            <a:off x="796625" y="3987881"/>
-            <a:ext cx="190927" cy="190927"/>
-          </a:xfrm>
-          <a:prstGeom prst="roundRect">
-            <a:avLst>
-              <a:gd name="adj" fmla="val 181992"/>
-            </a:avLst>
-          </a:prstGeom>
-          <a:solidFill>
-            <a:srgbClr val="FBBF24">
-              <a:alpha val="80000"/>
-            </a:srgbClr>
-          </a:solidFill>
-          <a:ln w="12700">
-            <a:solidFill>
-              <a:srgbClr val="333333"/>
-            </a:solidFill>
-            <a:prstDash val="solid"/>
-          </a:ln>
-        </p:spPr>
-      </p:sp>
-      <p:sp>
-        <p:nvSpPr>
-          <p:cNvPr id="43" name="Text 41"/>
+          <p:cNvPr id="36" name="Text 34"/>
           <p:cNvSpPr/>
           <p:nvPr/>
         </p:nvSpPr>
@@ -11314,7 +10063,7 @@
       </p:sp>
       <p:sp>
         <p:nvSpPr>
-          <p:cNvPr id="44" name="Text 42"/>
+          <p:cNvPr id="37" name="Text 35"/>
           <p:cNvSpPr/>
           <p:nvPr/>
         </p:nvSpPr>
@@ -11334,9 +10083,6 @@
           <a:lstStyle/>
           <a:p>
             <a:pPr indent="0" marL="0">
-              <a:lnSpc>
-                <a:spcPct val="115000"/>
-              </a:lnSpc>
               <a:buNone/>
             </a:pPr>
             <a:r>
@@ -11356,7 +10102,7 @@
       </p:sp>
       <p:sp>
         <p:nvSpPr>
-          <p:cNvPr id="45" name="Shape 43"/>
+          <p:cNvPr id="38" name="Shape 36"/>
           <p:cNvSpPr/>
           <p:nvPr/>
         </p:nvSpPr>
@@ -11376,7 +10122,7 @@
       </p:sp>
       <p:sp>
         <p:nvSpPr>
-          <p:cNvPr id="46" name="Shape 44"/>
+          <p:cNvPr id="39" name="Shape 37"/>
           <p:cNvSpPr/>
           <p:nvPr/>
         </p:nvSpPr>
@@ -11398,7 +10144,7 @@
       </p:sp>
       <p:sp>
         <p:nvSpPr>
-          <p:cNvPr id="47" name="Shape 45"/>
+          <p:cNvPr id="40" name="Shape 38"/>
           <p:cNvSpPr/>
           <p:nvPr/>
         </p:nvSpPr>
@@ -11429,7 +10175,7 @@
       </p:sp>
       <p:sp>
         <p:nvSpPr>
-          <p:cNvPr id="48" name="Text 46"/>
+          <p:cNvPr id="41" name="Text 39"/>
           <p:cNvSpPr/>
           <p:nvPr/>
         </p:nvSpPr>
@@ -11580,55 +10326,6 @@
         </p:nvSpPr>
         <p:spPr>
           <a:xfrm>
-            <a:off x="7909560" y="201168"/>
-            <a:ext cx="685800" cy="685800"/>
-          </a:xfrm>
-          <a:prstGeom prst="ellipse">
-            <a:avLst/>
-          </a:prstGeom>
-          <a:solidFill>
-            <a:srgbClr val="ECFDF5">
-              <a:alpha val="0"/>
-            </a:srgbClr>
-          </a:solidFill>
-          <a:ln w="15875">
-            <a:solidFill>
-              <a:srgbClr val="FBBF24"/>
-            </a:solidFill>
-            <a:prstDash val="solid"/>
-          </a:ln>
-        </p:spPr>
-      </p:sp>
-      <p:sp>
-        <p:nvSpPr>
-          <p:cNvPr id="6" name="Shape 4"/>
-          <p:cNvSpPr/>
-          <p:nvPr/>
-        </p:nvSpPr>
-        <p:spPr>
-          <a:xfrm>
-            <a:off x="8183880" y="384048"/>
-            <a:ext cx="384048" cy="384048"/>
-          </a:xfrm>
-          <a:prstGeom prst="ellipse">
-            <a:avLst/>
-          </a:prstGeom>
-          <a:solidFill>
-            <a:srgbClr val="FBBF24">
-              <a:alpha val="35000"/>
-            </a:srgbClr>
-          </a:solidFill>
-          <a:ln/>
-        </p:spPr>
-      </p:sp>
-      <p:sp>
-        <p:nvSpPr>
-          <p:cNvPr id="7" name="Shape 5"/>
-          <p:cNvSpPr/>
-          <p:nvPr/>
-        </p:nvSpPr>
-        <p:spPr>
-          <a:xfrm>
             <a:off x="109728" y="0"/>
             <a:ext cx="9034272" cy="960120"/>
           </a:xfrm>
@@ -11643,7 +10340,7 @@
       </p:sp>
       <p:sp>
         <p:nvSpPr>
-          <p:cNvPr id="8" name="Shape 6"/>
+          <p:cNvPr id="6" name="Shape 4"/>
           <p:cNvSpPr/>
           <p:nvPr/>
         </p:nvSpPr>
@@ -11665,7 +10362,7 @@
       </p:sp>
       <p:sp>
         <p:nvSpPr>
-          <p:cNvPr id="9" name="Shape 7"/>
+          <p:cNvPr id="7" name="Shape 5"/>
           <p:cNvSpPr/>
           <p:nvPr/>
         </p:nvSpPr>
@@ -11687,7 +10384,7 @@
       </p:sp>
       <p:sp>
         <p:nvSpPr>
-          <p:cNvPr id="10" name="Shape 8"/>
+          <p:cNvPr id="8" name="Shape 6"/>
           <p:cNvSpPr/>
           <p:nvPr/>
         </p:nvSpPr>
@@ -11707,7 +10404,7 @@
       </p:sp>
       <p:sp>
         <p:nvSpPr>
-          <p:cNvPr id="11" name="Shape 9"/>
+          <p:cNvPr id="9" name="Shape 7"/>
           <p:cNvSpPr/>
           <p:nvPr/>
         </p:nvSpPr>
@@ -11738,7 +10435,7 @@
       </p:sp>
       <p:sp>
         <p:nvSpPr>
-          <p:cNvPr id="12" name="Text 10"/>
+          <p:cNvPr id="10" name="Text 8"/>
           <p:cNvSpPr/>
           <p:nvPr/>
         </p:nvSpPr>
@@ -11779,7 +10476,7 @@
       </p:sp>
       <p:sp>
         <p:nvSpPr>
-          <p:cNvPr id="13" name="Text 11"/>
+          <p:cNvPr id="11" name="Text 9"/>
           <p:cNvSpPr/>
           <p:nvPr/>
         </p:nvSpPr>
@@ -11818,7 +10515,7 @@
       </p:sp>
       <p:sp>
         <p:nvSpPr>
-          <p:cNvPr id="14" name="Shape 12"/>
+          <p:cNvPr id="12" name="Shape 10"/>
           <p:cNvSpPr/>
           <p:nvPr/>
         </p:nvSpPr>
@@ -11852,7 +10549,7 @@
       </p:sp>
       <p:sp>
         <p:nvSpPr>
-          <p:cNvPr id="15" name="Shape 13"/>
+          <p:cNvPr id="13" name="Shape 11"/>
           <p:cNvSpPr/>
           <p:nvPr/>
         </p:nvSpPr>
@@ -11881,7 +10578,7 @@
       </p:sp>
       <p:sp>
         <p:nvSpPr>
-          <p:cNvPr id="16" name="Shape 14"/>
+          <p:cNvPr id="14" name="Shape 12"/>
           <p:cNvSpPr/>
           <p:nvPr/>
         </p:nvSpPr>
@@ -11903,7 +10600,7 @@
       </p:sp>
       <p:sp>
         <p:nvSpPr>
-          <p:cNvPr id="17" name="Shape 15"/>
+          <p:cNvPr id="15" name="Shape 13"/>
           <p:cNvSpPr/>
           <p:nvPr/>
         </p:nvSpPr>
@@ -11937,36 +10634,7 @@
       </p:sp>
       <p:sp>
         <p:nvSpPr>
-          <p:cNvPr id="18" name="Shape 16"/>
-          <p:cNvSpPr/>
-          <p:nvPr/>
-        </p:nvSpPr>
-        <p:spPr>
-          <a:xfrm>
-            <a:off x="796625" y="1500713"/>
-            <a:ext cx="190927" cy="190927"/>
-          </a:xfrm>
-          <a:prstGeom prst="roundRect">
-            <a:avLst>
-              <a:gd name="adj" fmla="val 181992"/>
-            </a:avLst>
-          </a:prstGeom>
-          <a:solidFill>
-            <a:srgbClr val="FBBF24">
-              <a:alpha val="80000"/>
-            </a:srgbClr>
-          </a:solidFill>
-          <a:ln w="12700">
-            <a:solidFill>
-              <a:srgbClr val="333333"/>
-            </a:solidFill>
-            <a:prstDash val="solid"/>
-          </a:ln>
-        </p:spPr>
-      </p:sp>
-      <p:sp>
-        <p:nvSpPr>
-          <p:cNvPr id="19" name="Text 17"/>
+          <p:cNvPr id="16" name="Text 14"/>
           <p:cNvSpPr/>
           <p:nvPr/>
         </p:nvSpPr>
@@ -12005,7 +10673,7 @@
       </p:sp>
       <p:sp>
         <p:nvSpPr>
-          <p:cNvPr id="20" name="Text 18"/>
+          <p:cNvPr id="17" name="Text 15"/>
           <p:cNvSpPr/>
           <p:nvPr/>
         </p:nvSpPr>
@@ -12025,9 +10693,6 @@
           <a:lstStyle/>
           <a:p>
             <a:pPr indent="0" marL="0">
-              <a:lnSpc>
-                <a:spcPct val="115000"/>
-              </a:lnSpc>
               <a:buNone/>
             </a:pPr>
             <a:r>
@@ -12047,7 +10712,7 @@
       </p:sp>
       <p:sp>
         <p:nvSpPr>
-          <p:cNvPr id="21" name="Shape 19"/>
+          <p:cNvPr id="18" name="Shape 16"/>
           <p:cNvSpPr/>
           <p:nvPr/>
         </p:nvSpPr>
@@ -12076,7 +10741,7 @@
       </p:sp>
       <p:sp>
         <p:nvSpPr>
-          <p:cNvPr id="22" name="Shape 20"/>
+          <p:cNvPr id="19" name="Shape 17"/>
           <p:cNvSpPr/>
           <p:nvPr/>
         </p:nvSpPr>
@@ -12098,7 +10763,7 @@
       </p:sp>
       <p:sp>
         <p:nvSpPr>
-          <p:cNvPr id="23" name="Shape 21"/>
+          <p:cNvPr id="20" name="Shape 18"/>
           <p:cNvSpPr/>
           <p:nvPr/>
         </p:nvSpPr>
@@ -12132,36 +10797,7 @@
       </p:sp>
       <p:sp>
         <p:nvSpPr>
-          <p:cNvPr id="24" name="Shape 22"/>
-          <p:cNvSpPr/>
-          <p:nvPr/>
-        </p:nvSpPr>
-        <p:spPr>
-          <a:xfrm>
-            <a:off x="796625" y="2122505"/>
-            <a:ext cx="190927" cy="190927"/>
-          </a:xfrm>
-          <a:prstGeom prst="roundRect">
-            <a:avLst>
-              <a:gd name="adj" fmla="val 181992"/>
-            </a:avLst>
-          </a:prstGeom>
-          <a:solidFill>
-            <a:srgbClr val="FBBF24">
-              <a:alpha val="80000"/>
-            </a:srgbClr>
-          </a:solidFill>
-          <a:ln w="12700">
-            <a:solidFill>
-              <a:srgbClr val="333333"/>
-            </a:solidFill>
-            <a:prstDash val="solid"/>
-          </a:ln>
-        </p:spPr>
-      </p:sp>
-      <p:sp>
-        <p:nvSpPr>
-          <p:cNvPr id="25" name="Text 23"/>
+          <p:cNvPr id="21" name="Text 19"/>
           <p:cNvSpPr/>
           <p:nvPr/>
         </p:nvSpPr>
@@ -12200,7 +10836,7 @@
       </p:sp>
       <p:sp>
         <p:nvSpPr>
-          <p:cNvPr id="26" name="Text 24"/>
+          <p:cNvPr id="22" name="Text 20"/>
           <p:cNvSpPr/>
           <p:nvPr/>
         </p:nvSpPr>
@@ -12220,9 +10856,6 @@
           <a:lstStyle/>
           <a:p>
             <a:pPr indent="0" marL="0">
-              <a:lnSpc>
-                <a:spcPct val="115000"/>
-              </a:lnSpc>
               <a:buNone/>
             </a:pPr>
             <a:r>
@@ -12242,7 +10875,7 @@
       </p:sp>
       <p:sp>
         <p:nvSpPr>
-          <p:cNvPr id="27" name="Shape 25"/>
+          <p:cNvPr id="23" name="Shape 21"/>
           <p:cNvSpPr/>
           <p:nvPr/>
         </p:nvSpPr>
@@ -12271,7 +10904,7 @@
       </p:sp>
       <p:sp>
         <p:nvSpPr>
-          <p:cNvPr id="28" name="Shape 26"/>
+          <p:cNvPr id="24" name="Shape 22"/>
           <p:cNvSpPr/>
           <p:nvPr/>
         </p:nvSpPr>
@@ -12293,7 +10926,7 @@
       </p:sp>
       <p:sp>
         <p:nvSpPr>
-          <p:cNvPr id="29" name="Shape 27"/>
+          <p:cNvPr id="25" name="Shape 23"/>
           <p:cNvSpPr/>
           <p:nvPr/>
         </p:nvSpPr>
@@ -12327,36 +10960,7 @@
       </p:sp>
       <p:sp>
         <p:nvSpPr>
-          <p:cNvPr id="30" name="Shape 28"/>
-          <p:cNvSpPr/>
-          <p:nvPr/>
-        </p:nvSpPr>
-        <p:spPr>
-          <a:xfrm>
-            <a:off x="796625" y="2744297"/>
-            <a:ext cx="190927" cy="190927"/>
-          </a:xfrm>
-          <a:prstGeom prst="roundRect">
-            <a:avLst>
-              <a:gd name="adj" fmla="val 181992"/>
-            </a:avLst>
-          </a:prstGeom>
-          <a:solidFill>
-            <a:srgbClr val="FBBF24">
-              <a:alpha val="80000"/>
-            </a:srgbClr>
-          </a:solidFill>
-          <a:ln w="12700">
-            <a:solidFill>
-              <a:srgbClr val="333333"/>
-            </a:solidFill>
-            <a:prstDash val="solid"/>
-          </a:ln>
-        </p:spPr>
-      </p:sp>
-      <p:sp>
-        <p:nvSpPr>
-          <p:cNvPr id="31" name="Text 29"/>
+          <p:cNvPr id="26" name="Text 24"/>
           <p:cNvSpPr/>
           <p:nvPr/>
         </p:nvSpPr>
@@ -12395,7 +10999,7 @@
       </p:sp>
       <p:sp>
         <p:nvSpPr>
-          <p:cNvPr id="32" name="Text 30"/>
+          <p:cNvPr id="27" name="Text 25"/>
           <p:cNvSpPr/>
           <p:nvPr/>
         </p:nvSpPr>
@@ -12415,9 +11019,6 @@
           <a:lstStyle/>
           <a:p>
             <a:pPr indent="0" marL="0">
-              <a:lnSpc>
-                <a:spcPct val="115000"/>
-              </a:lnSpc>
               <a:buNone/>
             </a:pPr>
             <a:r>
@@ -12437,7 +11038,7 @@
       </p:sp>
       <p:sp>
         <p:nvSpPr>
-          <p:cNvPr id="33" name="Shape 31"/>
+          <p:cNvPr id="28" name="Shape 26"/>
           <p:cNvSpPr/>
           <p:nvPr/>
         </p:nvSpPr>
@@ -12466,7 +11067,7 @@
       </p:sp>
       <p:sp>
         <p:nvSpPr>
-          <p:cNvPr id="34" name="Shape 32"/>
+          <p:cNvPr id="29" name="Shape 27"/>
           <p:cNvSpPr/>
           <p:nvPr/>
         </p:nvSpPr>
@@ -12488,7 +11089,7 @@
       </p:sp>
       <p:sp>
         <p:nvSpPr>
-          <p:cNvPr id="35" name="Shape 33"/>
+          <p:cNvPr id="30" name="Shape 28"/>
           <p:cNvSpPr/>
           <p:nvPr/>
         </p:nvSpPr>
@@ -12522,36 +11123,7 @@
       </p:sp>
       <p:sp>
         <p:nvSpPr>
-          <p:cNvPr id="36" name="Shape 34"/>
-          <p:cNvSpPr/>
-          <p:nvPr/>
-        </p:nvSpPr>
-        <p:spPr>
-          <a:xfrm>
-            <a:off x="796625" y="3366089"/>
-            <a:ext cx="190927" cy="190927"/>
-          </a:xfrm>
-          <a:prstGeom prst="roundRect">
-            <a:avLst>
-              <a:gd name="adj" fmla="val 181992"/>
-            </a:avLst>
-          </a:prstGeom>
-          <a:solidFill>
-            <a:srgbClr val="FBBF24">
-              <a:alpha val="80000"/>
-            </a:srgbClr>
-          </a:solidFill>
-          <a:ln w="12700">
-            <a:solidFill>
-              <a:srgbClr val="333333"/>
-            </a:solidFill>
-            <a:prstDash val="solid"/>
-          </a:ln>
-        </p:spPr>
-      </p:sp>
-      <p:sp>
-        <p:nvSpPr>
-          <p:cNvPr id="37" name="Text 35"/>
+          <p:cNvPr id="31" name="Text 29"/>
           <p:cNvSpPr/>
           <p:nvPr/>
         </p:nvSpPr>
@@ -12590,7 +11162,7 @@
       </p:sp>
       <p:sp>
         <p:nvSpPr>
-          <p:cNvPr id="38" name="Text 36"/>
+          <p:cNvPr id="32" name="Text 30"/>
           <p:cNvSpPr/>
           <p:nvPr/>
         </p:nvSpPr>
@@ -12610,9 +11182,6 @@
           <a:lstStyle/>
           <a:p>
             <a:pPr indent="0" marL="0">
-              <a:lnSpc>
-                <a:spcPct val="115000"/>
-              </a:lnSpc>
               <a:buNone/>
             </a:pPr>
             <a:r>
@@ -12632,7 +11201,7 @@
       </p:sp>
       <p:sp>
         <p:nvSpPr>
-          <p:cNvPr id="39" name="Shape 37"/>
+          <p:cNvPr id="33" name="Shape 31"/>
           <p:cNvSpPr/>
           <p:nvPr/>
         </p:nvSpPr>
@@ -12661,7 +11230,7 @@
       </p:sp>
       <p:sp>
         <p:nvSpPr>
-          <p:cNvPr id="40" name="Shape 38"/>
+          <p:cNvPr id="34" name="Shape 32"/>
           <p:cNvSpPr/>
           <p:nvPr/>
         </p:nvSpPr>
@@ -12683,7 +11252,7 @@
       </p:sp>
       <p:sp>
         <p:nvSpPr>
-          <p:cNvPr id="41" name="Shape 39"/>
+          <p:cNvPr id="35" name="Shape 33"/>
           <p:cNvSpPr/>
           <p:nvPr/>
         </p:nvSpPr>
@@ -12717,36 +11286,7 @@
       </p:sp>
       <p:sp>
         <p:nvSpPr>
-          <p:cNvPr id="42" name="Shape 40"/>
-          <p:cNvSpPr/>
-          <p:nvPr/>
-        </p:nvSpPr>
-        <p:spPr>
-          <a:xfrm>
-            <a:off x="796625" y="3987881"/>
-            <a:ext cx="190927" cy="190927"/>
-          </a:xfrm>
-          <a:prstGeom prst="roundRect">
-            <a:avLst>
-              <a:gd name="adj" fmla="val 181992"/>
-            </a:avLst>
-          </a:prstGeom>
-          <a:solidFill>
-            <a:srgbClr val="FBBF24">
-              <a:alpha val="80000"/>
-            </a:srgbClr>
-          </a:solidFill>
-          <a:ln w="12700">
-            <a:solidFill>
-              <a:srgbClr val="333333"/>
-            </a:solidFill>
-            <a:prstDash val="solid"/>
-          </a:ln>
-        </p:spPr>
-      </p:sp>
-      <p:sp>
-        <p:nvSpPr>
-          <p:cNvPr id="43" name="Text 41"/>
+          <p:cNvPr id="36" name="Text 34"/>
           <p:cNvSpPr/>
           <p:nvPr/>
         </p:nvSpPr>
@@ -12785,7 +11325,7 @@
       </p:sp>
       <p:sp>
         <p:nvSpPr>
-          <p:cNvPr id="44" name="Text 42"/>
+          <p:cNvPr id="37" name="Text 35"/>
           <p:cNvSpPr/>
           <p:nvPr/>
         </p:nvSpPr>
@@ -12805,9 +11345,6 @@
           <a:lstStyle/>
           <a:p>
             <a:pPr indent="0" marL="0">
-              <a:lnSpc>
-                <a:spcPct val="115000"/>
-              </a:lnSpc>
               <a:buNone/>
             </a:pPr>
             <a:r>
@@ -12827,7 +11364,7 @@
       </p:sp>
       <p:sp>
         <p:nvSpPr>
-          <p:cNvPr id="45" name="Shape 43"/>
+          <p:cNvPr id="38" name="Shape 36"/>
           <p:cNvSpPr/>
           <p:nvPr/>
         </p:nvSpPr>
@@ -12847,7 +11384,7 @@
       </p:sp>
       <p:sp>
         <p:nvSpPr>
-          <p:cNvPr id="46" name="Shape 44"/>
+          <p:cNvPr id="39" name="Shape 37"/>
           <p:cNvSpPr/>
           <p:nvPr/>
         </p:nvSpPr>
@@ -12869,7 +11406,7 @@
       </p:sp>
       <p:sp>
         <p:nvSpPr>
-          <p:cNvPr id="47" name="Shape 45"/>
+          <p:cNvPr id="40" name="Shape 38"/>
           <p:cNvSpPr/>
           <p:nvPr/>
         </p:nvSpPr>
@@ -12900,7 +11437,7 @@
       </p:sp>
       <p:sp>
         <p:nvSpPr>
-          <p:cNvPr id="48" name="Text 46"/>
+          <p:cNvPr id="41" name="Text 39"/>
           <p:cNvSpPr/>
           <p:nvPr/>
         </p:nvSpPr>
@@ -13051,55 +11588,6 @@
         </p:nvSpPr>
         <p:spPr>
           <a:xfrm>
-            <a:off x="7909560" y="201168"/>
-            <a:ext cx="685800" cy="685800"/>
-          </a:xfrm>
-          <a:prstGeom prst="ellipse">
-            <a:avLst/>
-          </a:prstGeom>
-          <a:solidFill>
-            <a:srgbClr val="ECFDF5">
-              <a:alpha val="0"/>
-            </a:srgbClr>
-          </a:solidFill>
-          <a:ln w="15875">
-            <a:solidFill>
-              <a:srgbClr val="FBBF24"/>
-            </a:solidFill>
-            <a:prstDash val="solid"/>
-          </a:ln>
-        </p:spPr>
-      </p:sp>
-      <p:sp>
-        <p:nvSpPr>
-          <p:cNvPr id="6" name="Shape 4"/>
-          <p:cNvSpPr/>
-          <p:nvPr/>
-        </p:nvSpPr>
-        <p:spPr>
-          <a:xfrm>
-            <a:off x="8183880" y="384048"/>
-            <a:ext cx="384048" cy="384048"/>
-          </a:xfrm>
-          <a:prstGeom prst="ellipse">
-            <a:avLst/>
-          </a:prstGeom>
-          <a:solidFill>
-            <a:srgbClr val="FBBF24">
-              <a:alpha val="35000"/>
-            </a:srgbClr>
-          </a:solidFill>
-          <a:ln/>
-        </p:spPr>
-      </p:sp>
-      <p:sp>
-        <p:nvSpPr>
-          <p:cNvPr id="7" name="Shape 5"/>
-          <p:cNvSpPr/>
-          <p:nvPr/>
-        </p:nvSpPr>
-        <p:spPr>
-          <a:xfrm>
             <a:off x="109728" y="0"/>
             <a:ext cx="9034272" cy="960120"/>
           </a:xfrm>
@@ -13114,7 +11602,7 @@
       </p:sp>
       <p:sp>
         <p:nvSpPr>
-          <p:cNvPr id="8" name="Shape 6"/>
+          <p:cNvPr id="6" name="Shape 4"/>
           <p:cNvSpPr/>
           <p:nvPr/>
         </p:nvSpPr>
@@ -13136,7 +11624,7 @@
       </p:sp>
       <p:sp>
         <p:nvSpPr>
-          <p:cNvPr id="9" name="Shape 7"/>
+          <p:cNvPr id="7" name="Shape 5"/>
           <p:cNvSpPr/>
           <p:nvPr/>
         </p:nvSpPr>
@@ -13158,7 +11646,7 @@
       </p:sp>
       <p:sp>
         <p:nvSpPr>
-          <p:cNvPr id="10" name="Shape 8"/>
+          <p:cNvPr id="8" name="Shape 6"/>
           <p:cNvSpPr/>
           <p:nvPr/>
         </p:nvSpPr>
@@ -13178,7 +11666,7 @@
       </p:sp>
       <p:sp>
         <p:nvSpPr>
-          <p:cNvPr id="11" name="Shape 9"/>
+          <p:cNvPr id="9" name="Shape 7"/>
           <p:cNvSpPr/>
           <p:nvPr/>
         </p:nvSpPr>
@@ -13209,7 +11697,7 @@
       </p:sp>
       <p:sp>
         <p:nvSpPr>
-          <p:cNvPr id="12" name="Text 10"/>
+          <p:cNvPr id="10" name="Text 8"/>
           <p:cNvSpPr/>
           <p:nvPr/>
         </p:nvSpPr>
@@ -13250,7 +11738,7 @@
       </p:sp>
       <p:sp>
         <p:nvSpPr>
-          <p:cNvPr id="13" name="Text 11"/>
+          <p:cNvPr id="11" name="Text 9"/>
           <p:cNvSpPr/>
           <p:nvPr/>
         </p:nvSpPr>
@@ -13289,7 +11777,7 @@
       </p:sp>
       <p:sp>
         <p:nvSpPr>
-          <p:cNvPr id="14" name="Shape 12"/>
+          <p:cNvPr id="12" name="Shape 10"/>
           <p:cNvSpPr/>
           <p:nvPr/>
         </p:nvSpPr>
@@ -13323,7 +11811,7 @@
       </p:sp>
       <p:sp>
         <p:nvSpPr>
-          <p:cNvPr id="15" name="Shape 13"/>
+          <p:cNvPr id="13" name="Shape 11"/>
           <p:cNvSpPr/>
           <p:nvPr/>
         </p:nvSpPr>
@@ -13352,7 +11840,7 @@
       </p:sp>
       <p:sp>
         <p:nvSpPr>
-          <p:cNvPr id="16" name="Shape 14"/>
+          <p:cNvPr id="14" name="Shape 12"/>
           <p:cNvSpPr/>
           <p:nvPr/>
         </p:nvSpPr>
@@ -13374,7 +11862,7 @@
       </p:sp>
       <p:sp>
         <p:nvSpPr>
-          <p:cNvPr id="17" name="Shape 15"/>
+          <p:cNvPr id="15" name="Shape 13"/>
           <p:cNvSpPr/>
           <p:nvPr/>
         </p:nvSpPr>
@@ -13408,36 +11896,7 @@
       </p:sp>
       <p:sp>
         <p:nvSpPr>
-          <p:cNvPr id="18" name="Shape 16"/>
-          <p:cNvSpPr/>
-          <p:nvPr/>
-        </p:nvSpPr>
-        <p:spPr>
-          <a:xfrm>
-            <a:off x="796625" y="1500713"/>
-            <a:ext cx="190927" cy="190927"/>
-          </a:xfrm>
-          <a:prstGeom prst="roundRect">
-            <a:avLst>
-              <a:gd name="adj" fmla="val 181992"/>
-            </a:avLst>
-          </a:prstGeom>
-          <a:solidFill>
-            <a:srgbClr val="FBBF24">
-              <a:alpha val="80000"/>
-            </a:srgbClr>
-          </a:solidFill>
-          <a:ln w="12700">
-            <a:solidFill>
-              <a:srgbClr val="333333"/>
-            </a:solidFill>
-            <a:prstDash val="solid"/>
-          </a:ln>
-        </p:spPr>
-      </p:sp>
-      <p:sp>
-        <p:nvSpPr>
-          <p:cNvPr id="19" name="Text 17"/>
+          <p:cNvPr id="16" name="Text 14"/>
           <p:cNvSpPr/>
           <p:nvPr/>
         </p:nvSpPr>
@@ -13476,7 +11935,7 @@
       </p:sp>
       <p:sp>
         <p:nvSpPr>
-          <p:cNvPr id="20" name="Text 18"/>
+          <p:cNvPr id="17" name="Text 15"/>
           <p:cNvSpPr/>
           <p:nvPr/>
         </p:nvSpPr>
@@ -13496,9 +11955,6 @@
           <a:lstStyle/>
           <a:p>
             <a:pPr indent="0" marL="0">
-              <a:lnSpc>
-                <a:spcPct val="115000"/>
-              </a:lnSpc>
               <a:buNone/>
             </a:pPr>
             <a:r>
@@ -13518,7 +11974,7 @@
       </p:sp>
       <p:sp>
         <p:nvSpPr>
-          <p:cNvPr id="21" name="Shape 19"/>
+          <p:cNvPr id="18" name="Shape 16"/>
           <p:cNvSpPr/>
           <p:nvPr/>
         </p:nvSpPr>
@@ -13547,7 +12003,7 @@
       </p:sp>
       <p:sp>
         <p:nvSpPr>
-          <p:cNvPr id="22" name="Shape 20"/>
+          <p:cNvPr id="19" name="Shape 17"/>
           <p:cNvSpPr/>
           <p:nvPr/>
         </p:nvSpPr>
@@ -13569,7 +12025,7 @@
       </p:sp>
       <p:sp>
         <p:nvSpPr>
-          <p:cNvPr id="23" name="Shape 21"/>
+          <p:cNvPr id="20" name="Shape 18"/>
           <p:cNvSpPr/>
           <p:nvPr/>
         </p:nvSpPr>
@@ -13603,36 +12059,7 @@
       </p:sp>
       <p:sp>
         <p:nvSpPr>
-          <p:cNvPr id="24" name="Shape 22"/>
-          <p:cNvSpPr/>
-          <p:nvPr/>
-        </p:nvSpPr>
-        <p:spPr>
-          <a:xfrm>
-            <a:off x="796625" y="2122505"/>
-            <a:ext cx="190927" cy="190927"/>
-          </a:xfrm>
-          <a:prstGeom prst="roundRect">
-            <a:avLst>
-              <a:gd name="adj" fmla="val 181992"/>
-            </a:avLst>
-          </a:prstGeom>
-          <a:solidFill>
-            <a:srgbClr val="FBBF24">
-              <a:alpha val="80000"/>
-            </a:srgbClr>
-          </a:solidFill>
-          <a:ln w="12700">
-            <a:solidFill>
-              <a:srgbClr val="333333"/>
-            </a:solidFill>
-            <a:prstDash val="solid"/>
-          </a:ln>
-        </p:spPr>
-      </p:sp>
-      <p:sp>
-        <p:nvSpPr>
-          <p:cNvPr id="25" name="Text 23"/>
+          <p:cNvPr id="21" name="Text 19"/>
           <p:cNvSpPr/>
           <p:nvPr/>
         </p:nvSpPr>
@@ -13671,7 +12098,7 @@
       </p:sp>
       <p:sp>
         <p:nvSpPr>
-          <p:cNvPr id="26" name="Text 24"/>
+          <p:cNvPr id="22" name="Text 20"/>
           <p:cNvSpPr/>
           <p:nvPr/>
         </p:nvSpPr>
@@ -13691,9 +12118,6 @@
           <a:lstStyle/>
           <a:p>
             <a:pPr indent="0" marL="0">
-              <a:lnSpc>
-                <a:spcPct val="115000"/>
-              </a:lnSpc>
               <a:buNone/>
             </a:pPr>
             <a:r>
@@ -13713,7 +12137,7 @@
       </p:sp>
       <p:sp>
         <p:nvSpPr>
-          <p:cNvPr id="27" name="Shape 25"/>
+          <p:cNvPr id="23" name="Shape 21"/>
           <p:cNvSpPr/>
           <p:nvPr/>
         </p:nvSpPr>
@@ -13742,7 +12166,7 @@
       </p:sp>
       <p:sp>
         <p:nvSpPr>
-          <p:cNvPr id="28" name="Shape 26"/>
+          <p:cNvPr id="24" name="Shape 22"/>
           <p:cNvSpPr/>
           <p:nvPr/>
         </p:nvSpPr>
@@ -13764,7 +12188,7 @@
       </p:sp>
       <p:sp>
         <p:nvSpPr>
-          <p:cNvPr id="29" name="Shape 27"/>
+          <p:cNvPr id="25" name="Shape 23"/>
           <p:cNvSpPr/>
           <p:nvPr/>
         </p:nvSpPr>
@@ -13798,36 +12222,7 @@
       </p:sp>
       <p:sp>
         <p:nvSpPr>
-          <p:cNvPr id="30" name="Shape 28"/>
-          <p:cNvSpPr/>
-          <p:nvPr/>
-        </p:nvSpPr>
-        <p:spPr>
-          <a:xfrm>
-            <a:off x="796625" y="2744297"/>
-            <a:ext cx="190927" cy="190927"/>
-          </a:xfrm>
-          <a:prstGeom prst="roundRect">
-            <a:avLst>
-              <a:gd name="adj" fmla="val 181992"/>
-            </a:avLst>
-          </a:prstGeom>
-          <a:solidFill>
-            <a:srgbClr val="FBBF24">
-              <a:alpha val="80000"/>
-            </a:srgbClr>
-          </a:solidFill>
-          <a:ln w="12700">
-            <a:solidFill>
-              <a:srgbClr val="333333"/>
-            </a:solidFill>
-            <a:prstDash val="solid"/>
-          </a:ln>
-        </p:spPr>
-      </p:sp>
-      <p:sp>
-        <p:nvSpPr>
-          <p:cNvPr id="31" name="Text 29"/>
+          <p:cNvPr id="26" name="Text 24"/>
           <p:cNvSpPr/>
           <p:nvPr/>
         </p:nvSpPr>
@@ -13866,7 +12261,7 @@
       </p:sp>
       <p:sp>
         <p:nvSpPr>
-          <p:cNvPr id="32" name="Text 30"/>
+          <p:cNvPr id="27" name="Text 25"/>
           <p:cNvSpPr/>
           <p:nvPr/>
         </p:nvSpPr>
@@ -13886,9 +12281,6 @@
           <a:lstStyle/>
           <a:p>
             <a:pPr indent="0" marL="0">
-              <a:lnSpc>
-                <a:spcPct val="115000"/>
-              </a:lnSpc>
               <a:buNone/>
             </a:pPr>
             <a:r>
@@ -13908,7 +12300,7 @@
       </p:sp>
       <p:sp>
         <p:nvSpPr>
-          <p:cNvPr id="33" name="Shape 31"/>
+          <p:cNvPr id="28" name="Shape 26"/>
           <p:cNvSpPr/>
           <p:nvPr/>
         </p:nvSpPr>
@@ -13937,7 +12329,7 @@
       </p:sp>
       <p:sp>
         <p:nvSpPr>
-          <p:cNvPr id="34" name="Shape 32"/>
+          <p:cNvPr id="29" name="Shape 27"/>
           <p:cNvSpPr/>
           <p:nvPr/>
         </p:nvSpPr>
@@ -13959,7 +12351,7 @@
       </p:sp>
       <p:sp>
         <p:nvSpPr>
-          <p:cNvPr id="35" name="Shape 33"/>
+          <p:cNvPr id="30" name="Shape 28"/>
           <p:cNvSpPr/>
           <p:nvPr/>
         </p:nvSpPr>
@@ -13993,36 +12385,7 @@
       </p:sp>
       <p:sp>
         <p:nvSpPr>
-          <p:cNvPr id="36" name="Shape 34"/>
-          <p:cNvSpPr/>
-          <p:nvPr/>
-        </p:nvSpPr>
-        <p:spPr>
-          <a:xfrm>
-            <a:off x="796625" y="3366089"/>
-            <a:ext cx="190927" cy="190927"/>
-          </a:xfrm>
-          <a:prstGeom prst="roundRect">
-            <a:avLst>
-              <a:gd name="adj" fmla="val 181992"/>
-            </a:avLst>
-          </a:prstGeom>
-          <a:solidFill>
-            <a:srgbClr val="FBBF24">
-              <a:alpha val="80000"/>
-            </a:srgbClr>
-          </a:solidFill>
-          <a:ln w="12700">
-            <a:solidFill>
-              <a:srgbClr val="333333"/>
-            </a:solidFill>
-            <a:prstDash val="solid"/>
-          </a:ln>
-        </p:spPr>
-      </p:sp>
-      <p:sp>
-        <p:nvSpPr>
-          <p:cNvPr id="37" name="Text 35"/>
+          <p:cNvPr id="31" name="Text 29"/>
           <p:cNvSpPr/>
           <p:nvPr/>
         </p:nvSpPr>
@@ -14061,7 +12424,7 @@
       </p:sp>
       <p:sp>
         <p:nvSpPr>
-          <p:cNvPr id="38" name="Text 36"/>
+          <p:cNvPr id="32" name="Text 30"/>
           <p:cNvSpPr/>
           <p:nvPr/>
         </p:nvSpPr>
@@ -14081,9 +12444,6 @@
           <a:lstStyle/>
           <a:p>
             <a:pPr indent="0" marL="0">
-              <a:lnSpc>
-                <a:spcPct val="115000"/>
-              </a:lnSpc>
               <a:buNone/>
             </a:pPr>
             <a:r>
@@ -14103,7 +12463,7 @@
       </p:sp>
       <p:sp>
         <p:nvSpPr>
-          <p:cNvPr id="39" name="Shape 37"/>
+          <p:cNvPr id="33" name="Shape 31"/>
           <p:cNvSpPr/>
           <p:nvPr/>
         </p:nvSpPr>
@@ -14132,7 +12492,7 @@
       </p:sp>
       <p:sp>
         <p:nvSpPr>
-          <p:cNvPr id="40" name="Shape 38"/>
+          <p:cNvPr id="34" name="Shape 32"/>
           <p:cNvSpPr/>
           <p:nvPr/>
         </p:nvSpPr>
@@ -14154,7 +12514,7 @@
       </p:sp>
       <p:sp>
         <p:nvSpPr>
-          <p:cNvPr id="41" name="Shape 39"/>
+          <p:cNvPr id="35" name="Shape 33"/>
           <p:cNvSpPr/>
           <p:nvPr/>
         </p:nvSpPr>
@@ -14188,36 +12548,7 @@
       </p:sp>
       <p:sp>
         <p:nvSpPr>
-          <p:cNvPr id="42" name="Shape 40"/>
-          <p:cNvSpPr/>
-          <p:nvPr/>
-        </p:nvSpPr>
-        <p:spPr>
-          <a:xfrm>
-            <a:off x="796625" y="3987881"/>
-            <a:ext cx="190927" cy="190927"/>
-          </a:xfrm>
-          <a:prstGeom prst="roundRect">
-            <a:avLst>
-              <a:gd name="adj" fmla="val 181992"/>
-            </a:avLst>
-          </a:prstGeom>
-          <a:solidFill>
-            <a:srgbClr val="FBBF24">
-              <a:alpha val="80000"/>
-            </a:srgbClr>
-          </a:solidFill>
-          <a:ln w="12700">
-            <a:solidFill>
-              <a:srgbClr val="333333"/>
-            </a:solidFill>
-            <a:prstDash val="solid"/>
-          </a:ln>
-        </p:spPr>
-      </p:sp>
-      <p:sp>
-        <p:nvSpPr>
-          <p:cNvPr id="43" name="Text 41"/>
+          <p:cNvPr id="36" name="Text 34"/>
           <p:cNvSpPr/>
           <p:nvPr/>
         </p:nvSpPr>
@@ -14256,7 +12587,7 @@
       </p:sp>
       <p:sp>
         <p:nvSpPr>
-          <p:cNvPr id="44" name="Text 42"/>
+          <p:cNvPr id="37" name="Text 35"/>
           <p:cNvSpPr/>
           <p:nvPr/>
         </p:nvSpPr>
@@ -14276,9 +12607,6 @@
           <a:lstStyle/>
           <a:p>
             <a:pPr indent="0" marL="0">
-              <a:lnSpc>
-                <a:spcPct val="115000"/>
-              </a:lnSpc>
               <a:buNone/>
             </a:pPr>
             <a:r>
@@ -14298,7 +12626,7 @@
       </p:sp>
       <p:sp>
         <p:nvSpPr>
-          <p:cNvPr id="45" name="Shape 43"/>
+          <p:cNvPr id="38" name="Shape 36"/>
           <p:cNvSpPr/>
           <p:nvPr/>
         </p:nvSpPr>
@@ -14318,7 +12646,7 @@
       </p:sp>
       <p:sp>
         <p:nvSpPr>
-          <p:cNvPr id="46" name="Shape 44"/>
+          <p:cNvPr id="39" name="Shape 37"/>
           <p:cNvSpPr/>
           <p:nvPr/>
         </p:nvSpPr>
@@ -14340,7 +12668,7 @@
       </p:sp>
       <p:sp>
         <p:nvSpPr>
-          <p:cNvPr id="47" name="Shape 45"/>
+          <p:cNvPr id="40" name="Shape 38"/>
           <p:cNvSpPr/>
           <p:nvPr/>
         </p:nvSpPr>
@@ -14371,7 +12699,7 @@
       </p:sp>
       <p:sp>
         <p:nvSpPr>
-          <p:cNvPr id="48" name="Text 46"/>
+          <p:cNvPr id="41" name="Text 39"/>
           <p:cNvSpPr/>
           <p:nvPr/>
         </p:nvSpPr>
@@ -14522,55 +12850,6 @@
         </p:nvSpPr>
         <p:spPr>
           <a:xfrm>
-            <a:off x="7909560" y="201168"/>
-            <a:ext cx="685800" cy="685800"/>
-          </a:xfrm>
-          <a:prstGeom prst="ellipse">
-            <a:avLst/>
-          </a:prstGeom>
-          <a:solidFill>
-            <a:srgbClr val="ECFDF5">
-              <a:alpha val="0"/>
-            </a:srgbClr>
-          </a:solidFill>
-          <a:ln w="15875">
-            <a:solidFill>
-              <a:srgbClr val="FBBF24"/>
-            </a:solidFill>
-            <a:prstDash val="solid"/>
-          </a:ln>
-        </p:spPr>
-      </p:sp>
-      <p:sp>
-        <p:nvSpPr>
-          <p:cNvPr id="6" name="Shape 4"/>
-          <p:cNvSpPr/>
-          <p:nvPr/>
-        </p:nvSpPr>
-        <p:spPr>
-          <a:xfrm>
-            <a:off x="8183880" y="384048"/>
-            <a:ext cx="384048" cy="384048"/>
-          </a:xfrm>
-          <a:prstGeom prst="ellipse">
-            <a:avLst/>
-          </a:prstGeom>
-          <a:solidFill>
-            <a:srgbClr val="FBBF24">
-              <a:alpha val="35000"/>
-            </a:srgbClr>
-          </a:solidFill>
-          <a:ln/>
-        </p:spPr>
-      </p:sp>
-      <p:sp>
-        <p:nvSpPr>
-          <p:cNvPr id="7" name="Shape 5"/>
-          <p:cNvSpPr/>
-          <p:nvPr/>
-        </p:nvSpPr>
-        <p:spPr>
-          <a:xfrm>
             <a:off x="109728" y="0"/>
             <a:ext cx="9034272" cy="960120"/>
           </a:xfrm>
@@ -14585,7 +12864,7 @@
       </p:sp>
       <p:sp>
         <p:nvSpPr>
-          <p:cNvPr id="8" name="Shape 6"/>
+          <p:cNvPr id="6" name="Shape 4"/>
           <p:cNvSpPr/>
           <p:nvPr/>
         </p:nvSpPr>
@@ -14607,7 +12886,7 @@
       </p:sp>
       <p:sp>
         <p:nvSpPr>
-          <p:cNvPr id="9" name="Shape 7"/>
+          <p:cNvPr id="7" name="Shape 5"/>
           <p:cNvSpPr/>
           <p:nvPr/>
         </p:nvSpPr>
@@ -14629,7 +12908,7 @@
       </p:sp>
       <p:sp>
         <p:nvSpPr>
-          <p:cNvPr id="10" name="Shape 8"/>
+          <p:cNvPr id="8" name="Shape 6"/>
           <p:cNvSpPr/>
           <p:nvPr/>
         </p:nvSpPr>
@@ -14649,7 +12928,7 @@
       </p:sp>
       <p:sp>
         <p:nvSpPr>
-          <p:cNvPr id="11" name="Shape 9"/>
+          <p:cNvPr id="9" name="Shape 7"/>
           <p:cNvSpPr/>
           <p:nvPr/>
         </p:nvSpPr>
@@ -14680,7 +12959,7 @@
       </p:sp>
       <p:sp>
         <p:nvSpPr>
-          <p:cNvPr id="12" name="Text 10"/>
+          <p:cNvPr id="10" name="Text 8"/>
           <p:cNvSpPr/>
           <p:nvPr/>
         </p:nvSpPr>
@@ -14721,7 +13000,7 @@
       </p:sp>
       <p:sp>
         <p:nvSpPr>
-          <p:cNvPr id="13" name="Text 11"/>
+          <p:cNvPr id="11" name="Text 9"/>
           <p:cNvSpPr/>
           <p:nvPr/>
         </p:nvSpPr>
@@ -14760,7 +13039,7 @@
       </p:sp>
       <p:sp>
         <p:nvSpPr>
-          <p:cNvPr id="14" name="Shape 12"/>
+          <p:cNvPr id="12" name="Shape 10"/>
           <p:cNvSpPr/>
           <p:nvPr/>
         </p:nvSpPr>
@@ -14794,7 +13073,7 @@
       </p:sp>
       <p:sp>
         <p:nvSpPr>
-          <p:cNvPr id="15" name="Shape 13"/>
+          <p:cNvPr id="13" name="Shape 11"/>
           <p:cNvSpPr/>
           <p:nvPr/>
         </p:nvSpPr>
@@ -14823,7 +13102,7 @@
       </p:sp>
       <p:sp>
         <p:nvSpPr>
-          <p:cNvPr id="16" name="Shape 14"/>
+          <p:cNvPr id="14" name="Shape 12"/>
           <p:cNvSpPr/>
           <p:nvPr/>
         </p:nvSpPr>
@@ -14845,7 +13124,7 @@
       </p:sp>
       <p:sp>
         <p:nvSpPr>
-          <p:cNvPr id="17" name="Shape 15"/>
+          <p:cNvPr id="15" name="Shape 13"/>
           <p:cNvSpPr/>
           <p:nvPr/>
         </p:nvSpPr>
@@ -14879,36 +13158,7 @@
       </p:sp>
       <p:sp>
         <p:nvSpPr>
-          <p:cNvPr id="18" name="Shape 16"/>
-          <p:cNvSpPr/>
-          <p:nvPr/>
-        </p:nvSpPr>
-        <p:spPr>
-          <a:xfrm>
-            <a:off x="796625" y="1500713"/>
-            <a:ext cx="190927" cy="190927"/>
-          </a:xfrm>
-          <a:prstGeom prst="roundRect">
-            <a:avLst>
-              <a:gd name="adj" fmla="val 181992"/>
-            </a:avLst>
-          </a:prstGeom>
-          <a:solidFill>
-            <a:srgbClr val="FBBF24">
-              <a:alpha val="80000"/>
-            </a:srgbClr>
-          </a:solidFill>
-          <a:ln w="12700">
-            <a:solidFill>
-              <a:srgbClr val="333333"/>
-            </a:solidFill>
-            <a:prstDash val="solid"/>
-          </a:ln>
-        </p:spPr>
-      </p:sp>
-      <p:sp>
-        <p:nvSpPr>
-          <p:cNvPr id="19" name="Text 17"/>
+          <p:cNvPr id="16" name="Text 14"/>
           <p:cNvSpPr/>
           <p:nvPr/>
         </p:nvSpPr>
@@ -14947,7 +13197,7 @@
       </p:sp>
       <p:sp>
         <p:nvSpPr>
-          <p:cNvPr id="20" name="Text 18"/>
+          <p:cNvPr id="17" name="Text 15"/>
           <p:cNvSpPr/>
           <p:nvPr/>
         </p:nvSpPr>
@@ -14967,9 +13217,6 @@
           <a:lstStyle/>
           <a:p>
             <a:pPr indent="0" marL="0">
-              <a:lnSpc>
-                <a:spcPct val="115000"/>
-              </a:lnSpc>
               <a:buNone/>
             </a:pPr>
             <a:r>
@@ -14989,7 +13236,7 @@
       </p:sp>
       <p:sp>
         <p:nvSpPr>
-          <p:cNvPr id="21" name="Shape 19"/>
+          <p:cNvPr id="18" name="Shape 16"/>
           <p:cNvSpPr/>
           <p:nvPr/>
         </p:nvSpPr>
@@ -15018,7 +13265,7 @@
       </p:sp>
       <p:sp>
         <p:nvSpPr>
-          <p:cNvPr id="22" name="Shape 20"/>
+          <p:cNvPr id="19" name="Shape 17"/>
           <p:cNvSpPr/>
           <p:nvPr/>
         </p:nvSpPr>
@@ -15040,7 +13287,7 @@
       </p:sp>
       <p:sp>
         <p:nvSpPr>
-          <p:cNvPr id="23" name="Shape 21"/>
+          <p:cNvPr id="20" name="Shape 18"/>
           <p:cNvSpPr/>
           <p:nvPr/>
         </p:nvSpPr>
@@ -15074,36 +13321,7 @@
       </p:sp>
       <p:sp>
         <p:nvSpPr>
-          <p:cNvPr id="24" name="Shape 22"/>
-          <p:cNvSpPr/>
-          <p:nvPr/>
-        </p:nvSpPr>
-        <p:spPr>
-          <a:xfrm>
-            <a:off x="796625" y="2122505"/>
-            <a:ext cx="190927" cy="190927"/>
-          </a:xfrm>
-          <a:prstGeom prst="roundRect">
-            <a:avLst>
-              <a:gd name="adj" fmla="val 181992"/>
-            </a:avLst>
-          </a:prstGeom>
-          <a:solidFill>
-            <a:srgbClr val="FBBF24">
-              <a:alpha val="80000"/>
-            </a:srgbClr>
-          </a:solidFill>
-          <a:ln w="12700">
-            <a:solidFill>
-              <a:srgbClr val="333333"/>
-            </a:solidFill>
-            <a:prstDash val="solid"/>
-          </a:ln>
-        </p:spPr>
-      </p:sp>
-      <p:sp>
-        <p:nvSpPr>
-          <p:cNvPr id="25" name="Text 23"/>
+          <p:cNvPr id="21" name="Text 19"/>
           <p:cNvSpPr/>
           <p:nvPr/>
         </p:nvSpPr>
@@ -15142,7 +13360,7 @@
       </p:sp>
       <p:sp>
         <p:nvSpPr>
-          <p:cNvPr id="26" name="Text 24"/>
+          <p:cNvPr id="22" name="Text 20"/>
           <p:cNvSpPr/>
           <p:nvPr/>
         </p:nvSpPr>
@@ -15162,9 +13380,6 @@
           <a:lstStyle/>
           <a:p>
             <a:pPr indent="0" marL="0">
-              <a:lnSpc>
-                <a:spcPct val="115000"/>
-              </a:lnSpc>
               <a:buNone/>
             </a:pPr>
             <a:r>
@@ -15184,7 +13399,7 @@
       </p:sp>
       <p:sp>
         <p:nvSpPr>
-          <p:cNvPr id="27" name="Shape 25"/>
+          <p:cNvPr id="23" name="Shape 21"/>
           <p:cNvSpPr/>
           <p:nvPr/>
         </p:nvSpPr>
@@ -15213,7 +13428,7 @@
       </p:sp>
       <p:sp>
         <p:nvSpPr>
-          <p:cNvPr id="28" name="Shape 26"/>
+          <p:cNvPr id="24" name="Shape 22"/>
           <p:cNvSpPr/>
           <p:nvPr/>
         </p:nvSpPr>
@@ -15235,7 +13450,7 @@
       </p:sp>
       <p:sp>
         <p:nvSpPr>
-          <p:cNvPr id="29" name="Shape 27"/>
+          <p:cNvPr id="25" name="Shape 23"/>
           <p:cNvSpPr/>
           <p:nvPr/>
         </p:nvSpPr>
@@ -15269,36 +13484,7 @@
       </p:sp>
       <p:sp>
         <p:nvSpPr>
-          <p:cNvPr id="30" name="Shape 28"/>
-          <p:cNvSpPr/>
-          <p:nvPr/>
-        </p:nvSpPr>
-        <p:spPr>
-          <a:xfrm>
-            <a:off x="796625" y="2744297"/>
-            <a:ext cx="190927" cy="190927"/>
-          </a:xfrm>
-          <a:prstGeom prst="roundRect">
-            <a:avLst>
-              <a:gd name="adj" fmla="val 181992"/>
-            </a:avLst>
-          </a:prstGeom>
-          <a:solidFill>
-            <a:srgbClr val="FBBF24">
-              <a:alpha val="80000"/>
-            </a:srgbClr>
-          </a:solidFill>
-          <a:ln w="12700">
-            <a:solidFill>
-              <a:srgbClr val="333333"/>
-            </a:solidFill>
-            <a:prstDash val="solid"/>
-          </a:ln>
-        </p:spPr>
-      </p:sp>
-      <p:sp>
-        <p:nvSpPr>
-          <p:cNvPr id="31" name="Text 29"/>
+          <p:cNvPr id="26" name="Text 24"/>
           <p:cNvSpPr/>
           <p:nvPr/>
         </p:nvSpPr>
@@ -15337,7 +13523,7 @@
       </p:sp>
       <p:sp>
         <p:nvSpPr>
-          <p:cNvPr id="32" name="Text 30"/>
+          <p:cNvPr id="27" name="Text 25"/>
           <p:cNvSpPr/>
           <p:nvPr/>
         </p:nvSpPr>
@@ -15357,9 +13543,6 @@
           <a:lstStyle/>
           <a:p>
             <a:pPr indent="0" marL="0">
-              <a:lnSpc>
-                <a:spcPct val="115000"/>
-              </a:lnSpc>
               <a:buNone/>
             </a:pPr>
             <a:r>
@@ -15379,7 +13562,7 @@
       </p:sp>
       <p:sp>
         <p:nvSpPr>
-          <p:cNvPr id="33" name="Shape 31"/>
+          <p:cNvPr id="28" name="Shape 26"/>
           <p:cNvSpPr/>
           <p:nvPr/>
         </p:nvSpPr>
@@ -15408,7 +13591,7 @@
       </p:sp>
       <p:sp>
         <p:nvSpPr>
-          <p:cNvPr id="34" name="Shape 32"/>
+          <p:cNvPr id="29" name="Shape 27"/>
           <p:cNvSpPr/>
           <p:nvPr/>
         </p:nvSpPr>
@@ -15430,7 +13613,7 @@
       </p:sp>
       <p:sp>
         <p:nvSpPr>
-          <p:cNvPr id="35" name="Shape 33"/>
+          <p:cNvPr id="30" name="Shape 28"/>
           <p:cNvSpPr/>
           <p:nvPr/>
         </p:nvSpPr>
@@ -15464,36 +13647,7 @@
       </p:sp>
       <p:sp>
         <p:nvSpPr>
-          <p:cNvPr id="36" name="Shape 34"/>
-          <p:cNvSpPr/>
-          <p:nvPr/>
-        </p:nvSpPr>
-        <p:spPr>
-          <a:xfrm>
-            <a:off x="796625" y="3366089"/>
-            <a:ext cx="190927" cy="190927"/>
-          </a:xfrm>
-          <a:prstGeom prst="roundRect">
-            <a:avLst>
-              <a:gd name="adj" fmla="val 181992"/>
-            </a:avLst>
-          </a:prstGeom>
-          <a:solidFill>
-            <a:srgbClr val="FBBF24">
-              <a:alpha val="80000"/>
-            </a:srgbClr>
-          </a:solidFill>
-          <a:ln w="12700">
-            <a:solidFill>
-              <a:srgbClr val="333333"/>
-            </a:solidFill>
-            <a:prstDash val="solid"/>
-          </a:ln>
-        </p:spPr>
-      </p:sp>
-      <p:sp>
-        <p:nvSpPr>
-          <p:cNvPr id="37" name="Text 35"/>
+          <p:cNvPr id="31" name="Text 29"/>
           <p:cNvSpPr/>
           <p:nvPr/>
         </p:nvSpPr>
@@ -15532,7 +13686,7 @@
       </p:sp>
       <p:sp>
         <p:nvSpPr>
-          <p:cNvPr id="38" name="Text 36"/>
+          <p:cNvPr id="32" name="Text 30"/>
           <p:cNvSpPr/>
           <p:nvPr/>
         </p:nvSpPr>
@@ -15552,9 +13706,6 @@
           <a:lstStyle/>
           <a:p>
             <a:pPr indent="0" marL="0">
-              <a:lnSpc>
-                <a:spcPct val="115000"/>
-              </a:lnSpc>
               <a:buNone/>
             </a:pPr>
             <a:r>
@@ -15574,7 +13725,7 @@
       </p:sp>
       <p:sp>
         <p:nvSpPr>
-          <p:cNvPr id="39" name="Shape 37"/>
+          <p:cNvPr id="33" name="Shape 31"/>
           <p:cNvSpPr/>
           <p:nvPr/>
         </p:nvSpPr>
@@ -15603,7 +13754,7 @@
       </p:sp>
       <p:sp>
         <p:nvSpPr>
-          <p:cNvPr id="40" name="Shape 38"/>
+          <p:cNvPr id="34" name="Shape 32"/>
           <p:cNvSpPr/>
           <p:nvPr/>
         </p:nvSpPr>
@@ -15625,7 +13776,7 @@
       </p:sp>
       <p:sp>
         <p:nvSpPr>
-          <p:cNvPr id="41" name="Shape 39"/>
+          <p:cNvPr id="35" name="Shape 33"/>
           <p:cNvSpPr/>
           <p:nvPr/>
         </p:nvSpPr>
@@ -15659,36 +13810,7 @@
       </p:sp>
       <p:sp>
         <p:nvSpPr>
-          <p:cNvPr id="42" name="Shape 40"/>
-          <p:cNvSpPr/>
-          <p:nvPr/>
-        </p:nvSpPr>
-        <p:spPr>
-          <a:xfrm>
-            <a:off x="796625" y="3987881"/>
-            <a:ext cx="190927" cy="190927"/>
-          </a:xfrm>
-          <a:prstGeom prst="roundRect">
-            <a:avLst>
-              <a:gd name="adj" fmla="val 181992"/>
-            </a:avLst>
-          </a:prstGeom>
-          <a:solidFill>
-            <a:srgbClr val="FBBF24">
-              <a:alpha val="80000"/>
-            </a:srgbClr>
-          </a:solidFill>
-          <a:ln w="12700">
-            <a:solidFill>
-              <a:srgbClr val="333333"/>
-            </a:solidFill>
-            <a:prstDash val="solid"/>
-          </a:ln>
-        </p:spPr>
-      </p:sp>
-      <p:sp>
-        <p:nvSpPr>
-          <p:cNvPr id="43" name="Text 41"/>
+          <p:cNvPr id="36" name="Text 34"/>
           <p:cNvSpPr/>
           <p:nvPr/>
         </p:nvSpPr>
@@ -15727,7 +13849,7 @@
       </p:sp>
       <p:sp>
         <p:nvSpPr>
-          <p:cNvPr id="44" name="Text 42"/>
+          <p:cNvPr id="37" name="Text 35"/>
           <p:cNvSpPr/>
           <p:nvPr/>
         </p:nvSpPr>
@@ -15747,9 +13869,6 @@
           <a:lstStyle/>
           <a:p>
             <a:pPr indent="0" marL="0">
-              <a:lnSpc>
-                <a:spcPct val="115000"/>
-              </a:lnSpc>
               <a:buNone/>
             </a:pPr>
             <a:r>
@@ -15769,7 +13888,7 @@
       </p:sp>
       <p:sp>
         <p:nvSpPr>
-          <p:cNvPr id="45" name="Shape 43"/>
+          <p:cNvPr id="38" name="Shape 36"/>
           <p:cNvSpPr/>
           <p:nvPr/>
         </p:nvSpPr>
@@ -15789,7 +13908,7 @@
       </p:sp>
       <p:sp>
         <p:nvSpPr>
-          <p:cNvPr id="46" name="Shape 44"/>
+          <p:cNvPr id="39" name="Shape 37"/>
           <p:cNvSpPr/>
           <p:nvPr/>
         </p:nvSpPr>
@@ -15811,7 +13930,7 @@
       </p:sp>
       <p:sp>
         <p:nvSpPr>
-          <p:cNvPr id="47" name="Shape 45"/>
+          <p:cNvPr id="40" name="Shape 38"/>
           <p:cNvSpPr/>
           <p:nvPr/>
         </p:nvSpPr>
@@ -15842,7 +13961,7 @@
       </p:sp>
       <p:sp>
         <p:nvSpPr>
-          <p:cNvPr id="48" name="Text 46"/>
+          <p:cNvPr id="41" name="Text 39"/>
           <p:cNvSpPr/>
           <p:nvPr/>
         </p:nvSpPr>
@@ -15993,55 +14112,6 @@
         </p:nvSpPr>
         <p:spPr>
           <a:xfrm>
-            <a:off x="7909560" y="201168"/>
-            <a:ext cx="685800" cy="685800"/>
-          </a:xfrm>
-          <a:prstGeom prst="ellipse">
-            <a:avLst/>
-          </a:prstGeom>
-          <a:solidFill>
-            <a:srgbClr val="ECFDF5">
-              <a:alpha val="0"/>
-            </a:srgbClr>
-          </a:solidFill>
-          <a:ln w="15875">
-            <a:solidFill>
-              <a:srgbClr val="FBBF24"/>
-            </a:solidFill>
-            <a:prstDash val="solid"/>
-          </a:ln>
-        </p:spPr>
-      </p:sp>
-      <p:sp>
-        <p:nvSpPr>
-          <p:cNvPr id="6" name="Shape 4"/>
-          <p:cNvSpPr/>
-          <p:nvPr/>
-        </p:nvSpPr>
-        <p:spPr>
-          <a:xfrm>
-            <a:off x="8183880" y="384048"/>
-            <a:ext cx="384048" cy="384048"/>
-          </a:xfrm>
-          <a:prstGeom prst="ellipse">
-            <a:avLst/>
-          </a:prstGeom>
-          <a:solidFill>
-            <a:srgbClr val="FBBF24">
-              <a:alpha val="35000"/>
-            </a:srgbClr>
-          </a:solidFill>
-          <a:ln/>
-        </p:spPr>
-      </p:sp>
-      <p:sp>
-        <p:nvSpPr>
-          <p:cNvPr id="7" name="Shape 5"/>
-          <p:cNvSpPr/>
-          <p:nvPr/>
-        </p:nvSpPr>
-        <p:spPr>
-          <a:xfrm>
             <a:off x="109728" y="0"/>
             <a:ext cx="9034272" cy="960120"/>
           </a:xfrm>
@@ -16056,7 +14126,7 @@
       </p:sp>
       <p:sp>
         <p:nvSpPr>
-          <p:cNvPr id="8" name="Shape 6"/>
+          <p:cNvPr id="6" name="Shape 4"/>
           <p:cNvSpPr/>
           <p:nvPr/>
         </p:nvSpPr>
@@ -16078,7 +14148,7 @@
       </p:sp>
       <p:sp>
         <p:nvSpPr>
-          <p:cNvPr id="9" name="Shape 7"/>
+          <p:cNvPr id="7" name="Shape 5"/>
           <p:cNvSpPr/>
           <p:nvPr/>
         </p:nvSpPr>
@@ -16100,7 +14170,7 @@
       </p:sp>
       <p:sp>
         <p:nvSpPr>
-          <p:cNvPr id="10" name="Shape 8"/>
+          <p:cNvPr id="8" name="Shape 6"/>
           <p:cNvSpPr/>
           <p:nvPr/>
         </p:nvSpPr>
@@ -16120,7 +14190,7 @@
       </p:sp>
       <p:sp>
         <p:nvSpPr>
-          <p:cNvPr id="11" name="Shape 9"/>
+          <p:cNvPr id="9" name="Shape 7"/>
           <p:cNvSpPr/>
           <p:nvPr/>
         </p:nvSpPr>
@@ -16151,7 +14221,7 @@
       </p:sp>
       <p:sp>
         <p:nvSpPr>
-          <p:cNvPr id="12" name="Text 10"/>
+          <p:cNvPr id="10" name="Text 8"/>
           <p:cNvSpPr/>
           <p:nvPr/>
         </p:nvSpPr>
@@ -16192,7 +14262,7 @@
       </p:sp>
       <p:sp>
         <p:nvSpPr>
-          <p:cNvPr id="13" name="Text 11"/>
+          <p:cNvPr id="11" name="Text 9"/>
           <p:cNvSpPr/>
           <p:nvPr/>
         </p:nvSpPr>
@@ -16231,7 +14301,7 @@
       </p:sp>
       <p:sp>
         <p:nvSpPr>
-          <p:cNvPr id="14" name="Shape 12"/>
+          <p:cNvPr id="12" name="Shape 10"/>
           <p:cNvSpPr/>
           <p:nvPr/>
         </p:nvSpPr>
@@ -16265,7 +14335,7 @@
       </p:sp>
       <p:sp>
         <p:nvSpPr>
-          <p:cNvPr id="15" name="Shape 13"/>
+          <p:cNvPr id="13" name="Shape 11"/>
           <p:cNvSpPr/>
           <p:nvPr/>
         </p:nvSpPr>
@@ -16294,7 +14364,7 @@
       </p:sp>
       <p:sp>
         <p:nvSpPr>
-          <p:cNvPr id="16" name="Shape 14"/>
+          <p:cNvPr id="14" name="Shape 12"/>
           <p:cNvSpPr/>
           <p:nvPr/>
         </p:nvSpPr>
@@ -16316,7 +14386,7 @@
       </p:sp>
       <p:sp>
         <p:nvSpPr>
-          <p:cNvPr id="17" name="Shape 15"/>
+          <p:cNvPr id="15" name="Shape 13"/>
           <p:cNvSpPr/>
           <p:nvPr/>
         </p:nvSpPr>
@@ -16350,36 +14420,7 @@
       </p:sp>
       <p:sp>
         <p:nvSpPr>
-          <p:cNvPr id="18" name="Shape 16"/>
-          <p:cNvSpPr/>
-          <p:nvPr/>
-        </p:nvSpPr>
-        <p:spPr>
-          <a:xfrm>
-            <a:off x="796625" y="1500713"/>
-            <a:ext cx="190927" cy="190927"/>
-          </a:xfrm>
-          <a:prstGeom prst="roundRect">
-            <a:avLst>
-              <a:gd name="adj" fmla="val 181992"/>
-            </a:avLst>
-          </a:prstGeom>
-          <a:solidFill>
-            <a:srgbClr val="FBBF24">
-              <a:alpha val="80000"/>
-            </a:srgbClr>
-          </a:solidFill>
-          <a:ln w="12700">
-            <a:solidFill>
-              <a:srgbClr val="333333"/>
-            </a:solidFill>
-            <a:prstDash val="solid"/>
-          </a:ln>
-        </p:spPr>
-      </p:sp>
-      <p:sp>
-        <p:nvSpPr>
-          <p:cNvPr id="19" name="Text 17"/>
+          <p:cNvPr id="16" name="Text 14"/>
           <p:cNvSpPr/>
           <p:nvPr/>
         </p:nvSpPr>
@@ -16418,7 +14459,7 @@
       </p:sp>
       <p:sp>
         <p:nvSpPr>
-          <p:cNvPr id="20" name="Text 18"/>
+          <p:cNvPr id="17" name="Text 15"/>
           <p:cNvSpPr/>
           <p:nvPr/>
         </p:nvSpPr>
@@ -16438,9 +14479,6 @@
           <a:lstStyle/>
           <a:p>
             <a:pPr indent="0" marL="0">
-              <a:lnSpc>
-                <a:spcPct val="115000"/>
-              </a:lnSpc>
               <a:buNone/>
             </a:pPr>
             <a:r>
@@ -16460,7 +14498,7 @@
       </p:sp>
       <p:sp>
         <p:nvSpPr>
-          <p:cNvPr id="21" name="Shape 19"/>
+          <p:cNvPr id="18" name="Shape 16"/>
           <p:cNvSpPr/>
           <p:nvPr/>
         </p:nvSpPr>
@@ -16489,7 +14527,7 @@
       </p:sp>
       <p:sp>
         <p:nvSpPr>
-          <p:cNvPr id="22" name="Shape 20"/>
+          <p:cNvPr id="19" name="Shape 17"/>
           <p:cNvSpPr/>
           <p:nvPr/>
         </p:nvSpPr>
@@ -16511,7 +14549,7 @@
       </p:sp>
       <p:sp>
         <p:nvSpPr>
-          <p:cNvPr id="23" name="Shape 21"/>
+          <p:cNvPr id="20" name="Shape 18"/>
           <p:cNvSpPr/>
           <p:nvPr/>
         </p:nvSpPr>
@@ -16545,36 +14583,7 @@
       </p:sp>
       <p:sp>
         <p:nvSpPr>
-          <p:cNvPr id="24" name="Shape 22"/>
-          <p:cNvSpPr/>
-          <p:nvPr/>
-        </p:nvSpPr>
-        <p:spPr>
-          <a:xfrm>
-            <a:off x="796625" y="2122505"/>
-            <a:ext cx="190927" cy="190927"/>
-          </a:xfrm>
-          <a:prstGeom prst="roundRect">
-            <a:avLst>
-              <a:gd name="adj" fmla="val 181992"/>
-            </a:avLst>
-          </a:prstGeom>
-          <a:solidFill>
-            <a:srgbClr val="FBBF24">
-              <a:alpha val="80000"/>
-            </a:srgbClr>
-          </a:solidFill>
-          <a:ln w="12700">
-            <a:solidFill>
-              <a:srgbClr val="333333"/>
-            </a:solidFill>
-            <a:prstDash val="solid"/>
-          </a:ln>
-        </p:spPr>
-      </p:sp>
-      <p:sp>
-        <p:nvSpPr>
-          <p:cNvPr id="25" name="Text 23"/>
+          <p:cNvPr id="21" name="Text 19"/>
           <p:cNvSpPr/>
           <p:nvPr/>
         </p:nvSpPr>
@@ -16613,7 +14622,7 @@
       </p:sp>
       <p:sp>
         <p:nvSpPr>
-          <p:cNvPr id="26" name="Text 24"/>
+          <p:cNvPr id="22" name="Text 20"/>
           <p:cNvSpPr/>
           <p:nvPr/>
         </p:nvSpPr>
@@ -16633,9 +14642,6 @@
           <a:lstStyle/>
           <a:p>
             <a:pPr indent="0" marL="0">
-              <a:lnSpc>
-                <a:spcPct val="115000"/>
-              </a:lnSpc>
               <a:buNone/>
             </a:pPr>
             <a:r>
@@ -16655,7 +14661,7 @@
       </p:sp>
       <p:sp>
         <p:nvSpPr>
-          <p:cNvPr id="27" name="Shape 25"/>
+          <p:cNvPr id="23" name="Shape 21"/>
           <p:cNvSpPr/>
           <p:nvPr/>
         </p:nvSpPr>
@@ -16684,7 +14690,7 @@
       </p:sp>
       <p:sp>
         <p:nvSpPr>
-          <p:cNvPr id="28" name="Shape 26"/>
+          <p:cNvPr id="24" name="Shape 22"/>
           <p:cNvSpPr/>
           <p:nvPr/>
         </p:nvSpPr>
@@ -16706,7 +14712,7 @@
       </p:sp>
       <p:sp>
         <p:nvSpPr>
-          <p:cNvPr id="29" name="Shape 27"/>
+          <p:cNvPr id="25" name="Shape 23"/>
           <p:cNvSpPr/>
           <p:nvPr/>
         </p:nvSpPr>
@@ -16740,36 +14746,7 @@
       </p:sp>
       <p:sp>
         <p:nvSpPr>
-          <p:cNvPr id="30" name="Shape 28"/>
-          <p:cNvSpPr/>
-          <p:nvPr/>
-        </p:nvSpPr>
-        <p:spPr>
-          <a:xfrm>
-            <a:off x="796625" y="2744297"/>
-            <a:ext cx="190927" cy="190927"/>
-          </a:xfrm>
-          <a:prstGeom prst="roundRect">
-            <a:avLst>
-              <a:gd name="adj" fmla="val 181992"/>
-            </a:avLst>
-          </a:prstGeom>
-          <a:solidFill>
-            <a:srgbClr val="FBBF24">
-              <a:alpha val="80000"/>
-            </a:srgbClr>
-          </a:solidFill>
-          <a:ln w="12700">
-            <a:solidFill>
-              <a:srgbClr val="333333"/>
-            </a:solidFill>
-            <a:prstDash val="solid"/>
-          </a:ln>
-        </p:spPr>
-      </p:sp>
-      <p:sp>
-        <p:nvSpPr>
-          <p:cNvPr id="31" name="Text 29"/>
+          <p:cNvPr id="26" name="Text 24"/>
           <p:cNvSpPr/>
           <p:nvPr/>
         </p:nvSpPr>
@@ -16808,7 +14785,7 @@
       </p:sp>
       <p:sp>
         <p:nvSpPr>
-          <p:cNvPr id="32" name="Text 30"/>
+          <p:cNvPr id="27" name="Text 25"/>
           <p:cNvSpPr/>
           <p:nvPr/>
         </p:nvSpPr>
@@ -16828,9 +14805,6 @@
           <a:lstStyle/>
           <a:p>
             <a:pPr indent="0" marL="0">
-              <a:lnSpc>
-                <a:spcPct val="115000"/>
-              </a:lnSpc>
               <a:buNone/>
             </a:pPr>
             <a:r>
@@ -16850,7 +14824,7 @@
       </p:sp>
       <p:sp>
         <p:nvSpPr>
-          <p:cNvPr id="33" name="Shape 31"/>
+          <p:cNvPr id="28" name="Shape 26"/>
           <p:cNvSpPr/>
           <p:nvPr/>
         </p:nvSpPr>
@@ -16879,7 +14853,7 @@
       </p:sp>
       <p:sp>
         <p:nvSpPr>
-          <p:cNvPr id="34" name="Shape 32"/>
+          <p:cNvPr id="29" name="Shape 27"/>
           <p:cNvSpPr/>
           <p:nvPr/>
         </p:nvSpPr>
@@ -16901,7 +14875,7 @@
       </p:sp>
       <p:sp>
         <p:nvSpPr>
-          <p:cNvPr id="35" name="Shape 33"/>
+          <p:cNvPr id="30" name="Shape 28"/>
           <p:cNvSpPr/>
           <p:nvPr/>
         </p:nvSpPr>
@@ -16935,36 +14909,7 @@
       </p:sp>
       <p:sp>
         <p:nvSpPr>
-          <p:cNvPr id="36" name="Shape 34"/>
-          <p:cNvSpPr/>
-          <p:nvPr/>
-        </p:nvSpPr>
-        <p:spPr>
-          <a:xfrm>
-            <a:off x="796625" y="3366089"/>
-            <a:ext cx="190927" cy="190927"/>
-          </a:xfrm>
-          <a:prstGeom prst="roundRect">
-            <a:avLst>
-              <a:gd name="adj" fmla="val 181992"/>
-            </a:avLst>
-          </a:prstGeom>
-          <a:solidFill>
-            <a:srgbClr val="FBBF24">
-              <a:alpha val="80000"/>
-            </a:srgbClr>
-          </a:solidFill>
-          <a:ln w="12700">
-            <a:solidFill>
-              <a:srgbClr val="333333"/>
-            </a:solidFill>
-            <a:prstDash val="solid"/>
-          </a:ln>
-        </p:spPr>
-      </p:sp>
-      <p:sp>
-        <p:nvSpPr>
-          <p:cNvPr id="37" name="Text 35"/>
+          <p:cNvPr id="31" name="Text 29"/>
           <p:cNvSpPr/>
           <p:nvPr/>
         </p:nvSpPr>
@@ -17003,7 +14948,7 @@
       </p:sp>
       <p:sp>
         <p:nvSpPr>
-          <p:cNvPr id="38" name="Text 36"/>
+          <p:cNvPr id="32" name="Text 30"/>
           <p:cNvSpPr/>
           <p:nvPr/>
         </p:nvSpPr>
@@ -17023,9 +14968,6 @@
           <a:lstStyle/>
           <a:p>
             <a:pPr indent="0" marL="0">
-              <a:lnSpc>
-                <a:spcPct val="115000"/>
-              </a:lnSpc>
               <a:buNone/>
             </a:pPr>
             <a:r>
@@ -17045,7 +14987,7 @@
       </p:sp>
       <p:sp>
         <p:nvSpPr>
-          <p:cNvPr id="39" name="Shape 37"/>
+          <p:cNvPr id="33" name="Shape 31"/>
           <p:cNvSpPr/>
           <p:nvPr/>
         </p:nvSpPr>
@@ -17074,7 +15016,7 @@
       </p:sp>
       <p:sp>
         <p:nvSpPr>
-          <p:cNvPr id="40" name="Shape 38"/>
+          <p:cNvPr id="34" name="Shape 32"/>
           <p:cNvSpPr/>
           <p:nvPr/>
         </p:nvSpPr>
@@ -17096,7 +15038,7 @@
       </p:sp>
       <p:sp>
         <p:nvSpPr>
-          <p:cNvPr id="41" name="Shape 39"/>
+          <p:cNvPr id="35" name="Shape 33"/>
           <p:cNvSpPr/>
           <p:nvPr/>
         </p:nvSpPr>
@@ -17130,36 +15072,7 @@
       </p:sp>
       <p:sp>
         <p:nvSpPr>
-          <p:cNvPr id="42" name="Shape 40"/>
-          <p:cNvSpPr/>
-          <p:nvPr/>
-        </p:nvSpPr>
-        <p:spPr>
-          <a:xfrm>
-            <a:off x="796625" y="3987881"/>
-            <a:ext cx="190927" cy="190927"/>
-          </a:xfrm>
-          <a:prstGeom prst="roundRect">
-            <a:avLst>
-              <a:gd name="adj" fmla="val 181992"/>
-            </a:avLst>
-          </a:prstGeom>
-          <a:solidFill>
-            <a:srgbClr val="FBBF24">
-              <a:alpha val="80000"/>
-            </a:srgbClr>
-          </a:solidFill>
-          <a:ln w="12700">
-            <a:solidFill>
-              <a:srgbClr val="333333"/>
-            </a:solidFill>
-            <a:prstDash val="solid"/>
-          </a:ln>
-        </p:spPr>
-      </p:sp>
-      <p:sp>
-        <p:nvSpPr>
-          <p:cNvPr id="43" name="Text 41"/>
+          <p:cNvPr id="36" name="Text 34"/>
           <p:cNvSpPr/>
           <p:nvPr/>
         </p:nvSpPr>
@@ -17198,7 +15111,7 @@
       </p:sp>
       <p:sp>
         <p:nvSpPr>
-          <p:cNvPr id="44" name="Text 42"/>
+          <p:cNvPr id="37" name="Text 35"/>
           <p:cNvSpPr/>
           <p:nvPr/>
         </p:nvSpPr>
@@ -17218,9 +15131,6 @@
           <a:lstStyle/>
           <a:p>
             <a:pPr indent="0" marL="0">
-              <a:lnSpc>
-                <a:spcPct val="115000"/>
-              </a:lnSpc>
               <a:buNone/>
             </a:pPr>
             <a:r>
@@ -17240,7 +15150,7 @@
       </p:sp>
       <p:sp>
         <p:nvSpPr>
-          <p:cNvPr id="45" name="Shape 43"/>
+          <p:cNvPr id="38" name="Shape 36"/>
           <p:cNvSpPr/>
           <p:nvPr/>
         </p:nvSpPr>
@@ -17260,7 +15170,7 @@
       </p:sp>
       <p:sp>
         <p:nvSpPr>
-          <p:cNvPr id="46" name="Shape 44"/>
+          <p:cNvPr id="39" name="Shape 37"/>
           <p:cNvSpPr/>
           <p:nvPr/>
         </p:nvSpPr>
@@ -17282,7 +15192,7 @@
       </p:sp>
       <p:sp>
         <p:nvSpPr>
-          <p:cNvPr id="47" name="Shape 45"/>
+          <p:cNvPr id="40" name="Shape 38"/>
           <p:cNvSpPr/>
           <p:nvPr/>
         </p:nvSpPr>
@@ -17313,7 +15223,7 @@
       </p:sp>
       <p:sp>
         <p:nvSpPr>
-          <p:cNvPr id="48" name="Text 46"/>
+          <p:cNvPr id="41" name="Text 39"/>
           <p:cNvSpPr/>
           <p:nvPr/>
         </p:nvSpPr>
